--- a/Docs/meeting notes/0807.pptx
+++ b/Docs/meeting notes/0807.pptx
@@ -5,19 +5,22 @@
     <p:sldMasterId id="2147483648" r:id="rId1"/>
   </p:sldMasterIdLst>
   <p:sldIdLst>
-    <p:sldId id="257" r:id="rId2"/>
-    <p:sldId id="262" r:id="rId3"/>
-    <p:sldId id="258" r:id="rId4"/>
-    <p:sldId id="259" r:id="rId5"/>
-    <p:sldId id="263" r:id="rId6"/>
-    <p:sldId id="260" r:id="rId7"/>
-    <p:sldId id="261" r:id="rId8"/>
-    <p:sldId id="269" r:id="rId9"/>
-    <p:sldId id="271" r:id="rId10"/>
-    <p:sldId id="272" r:id="rId11"/>
-    <p:sldId id="273" r:id="rId12"/>
-    <p:sldId id="267" r:id="rId13"/>
-    <p:sldId id="268" r:id="rId14"/>
+    <p:sldId id="276" r:id="rId2"/>
+    <p:sldId id="277" r:id="rId3"/>
+    <p:sldId id="257" r:id="rId4"/>
+    <p:sldId id="274" r:id="rId5"/>
+    <p:sldId id="275" r:id="rId6"/>
+    <p:sldId id="262" r:id="rId7"/>
+    <p:sldId id="258" r:id="rId8"/>
+    <p:sldId id="263" r:id="rId9"/>
+    <p:sldId id="260" r:id="rId10"/>
+    <p:sldId id="261" r:id="rId11"/>
+    <p:sldId id="269" r:id="rId12"/>
+    <p:sldId id="271" r:id="rId13"/>
+    <p:sldId id="272" r:id="rId14"/>
+    <p:sldId id="278" r:id="rId15"/>
+    <p:sldId id="279" r:id="rId16"/>
+    <p:sldId id="267" r:id="rId17"/>
   </p:sldIdLst>
   <p:sldSz cx="12192000" cy="6858000"/>
   <p:notesSz cx="6858000" cy="9144000"/>
@@ -117,6 +120,38 @@
     </a:lvl9pPr>
   </p:defaultTextStyle>
   <p:extLst>
+    <p:ext uri="{521415D9-36F7-43E2-AB2F-B90AF26B5E84}">
+      <p14:sectionLst xmlns:p14="http://schemas.microsoft.com/office/powerpoint/2010/main">
+        <p14:section name="Default Section" id="{034FCD23-7CEF-4C4B-AE59-D56BC0CC962E}">
+          <p14:sldIdLst>
+            <p14:sldId id="276"/>
+          </p14:sldIdLst>
+        </p14:section>
+        <p14:section name="Untitled Section" id="{3A27A2DE-D404-4E39-96F3-F8207532AED3}">
+          <p14:sldIdLst>
+            <p14:sldId id="277"/>
+            <p14:sldId id="257"/>
+            <p14:sldId id="274"/>
+            <p14:sldId id="275"/>
+          </p14:sldIdLst>
+        </p14:section>
+        <p14:section name="Today" id="{D47115A2-1977-4F93-A927-B8DC1DA791B2}">
+          <p14:sldIdLst>
+            <p14:sldId id="262"/>
+            <p14:sldId id="258"/>
+            <p14:sldId id="263"/>
+            <p14:sldId id="260"/>
+            <p14:sldId id="261"/>
+            <p14:sldId id="269"/>
+            <p14:sldId id="271"/>
+            <p14:sldId id="272"/>
+            <p14:sldId id="278"/>
+            <p14:sldId id="279"/>
+            <p14:sldId id="267"/>
+          </p14:sldIdLst>
+        </p14:section>
+      </p14:sectionLst>
+    </p:ext>
     <p:ext uri="{EFAFB233-063F-42B5-8137-9DF3F51BA10A}">
       <p15:sldGuideLst xmlns:p15="http://schemas.microsoft.com/office/powerpoint/2012/main"/>
     </p:ext>
@@ -196,6 +231,34 @@
           <inkml:channelProperty channel="F" name="resolution" value="0" units="1/dev"/>
         </inkml:channelProperties>
       </inkml:inkSource>
+      <inkml:timestamp xml:id="ts0" timeString="2025-08-06T19:20:59.494"/>
+    </inkml:context>
+    <inkml:brush xml:id="br0">
+      <inkml:brushProperty name="width" value="0.05" units="cm"/>
+      <inkml:brushProperty name="height" value="0.05" units="cm"/>
+      <inkml:brushProperty name="color" value="#E71224"/>
+    </inkml:brush>
+  </inkml:definitions>
+  <inkml:trace contextRef="#ctx0" brushRef="#br0">0 0 24221,'1770'128'0</inkml:trace>
+</inkml:ink>
+</file>
+
+<file path=ppt/ink/ink4.xml><?xml version="1.0" encoding="utf-8"?>
+<inkml:ink xmlns:inkml="http://www.w3.org/2003/InkML">
+  <inkml:definitions>
+    <inkml:context xml:id="ctx0">
+      <inkml:inkSource xml:id="inkSrc0">
+        <inkml:traceFormat>
+          <inkml:channel name="X" type="integer" min="-2.14748E9" max="2.14748E9" units="cm"/>
+          <inkml:channel name="Y" type="integer" min="-2.14748E9" max="2.14748E9" units="cm"/>
+          <inkml:channel name="F" type="integer" max="32767" units="dev"/>
+        </inkml:traceFormat>
+        <inkml:channelProperties>
+          <inkml:channelProperty channel="X" name="resolution" value="1000" units="1/cm"/>
+          <inkml:channelProperty channel="Y" name="resolution" value="1000" units="1/cm"/>
+          <inkml:channelProperty channel="F" name="resolution" value="0" units="1/dev"/>
+        </inkml:channelProperties>
+      </inkml:inkSource>
       <inkml:timestamp xml:id="ts0" timeString="2025-08-05T16:54:11.491"/>
     </inkml:context>
     <inkml:brush xml:id="br0">
@@ -208,7 +271,7 @@
 </inkml:ink>
 </file>
 
-<file path=ppt/ink/ink4.xml><?xml version="1.0" encoding="utf-8"?>
+<file path=ppt/ink/ink5.xml><?xml version="1.0" encoding="utf-8"?>
 <inkml:ink xmlns:inkml="http://www.w3.org/2003/InkML">
   <inkml:definitions>
     <inkml:context xml:id="ctx0">
@@ -236,7 +299,7 @@
 </inkml:ink>
 </file>
 
-<file path=ppt/ink/ink5.xml><?xml version="1.0" encoding="utf-8"?>
+<file path=ppt/ink/ink6.xml><?xml version="1.0" encoding="utf-8"?>
 <inkml:ink xmlns:inkml="http://www.w3.org/2003/InkML">
   <inkml:definitions>
     <inkml:context xml:id="ctx0">
@@ -264,7 +327,7 @@
 </inkml:ink>
 </file>
 
-<file path=ppt/ink/ink6.xml><?xml version="1.0" encoding="utf-8"?>
+<file path=ppt/ink/ink7.xml><?xml version="1.0" encoding="utf-8"?>
 <inkml:ink xmlns:inkml="http://www.w3.org/2003/InkML">
   <inkml:definitions>
     <inkml:context xml:id="ctx0">
@@ -292,7 +355,7 @@
 </inkml:ink>
 </file>
 
-<file path=ppt/ink/ink7.xml><?xml version="1.0" encoding="utf-8"?>
+<file path=ppt/ink/ink8.xml><?xml version="1.0" encoding="utf-8"?>
 <inkml:ink xmlns:inkml="http://www.w3.org/2003/InkML">
   <inkml:definitions>
     <inkml:context xml:id="ctx0">
@@ -320,7 +383,7 @@
 </inkml:ink>
 </file>
 
-<file path=ppt/ink/ink8.xml><?xml version="1.0" encoding="utf-8"?>
+<file path=ppt/ink/ink9.xml><?xml version="1.0" encoding="utf-8"?>
 <inkml:ink xmlns:inkml="http://www.w3.org/2003/InkML">
   <inkml:definitions>
     <inkml:context xml:id="ctx0">
@@ -495,9 +558,9 @@
           <a:p>
             <a:fld id="{6A1665DE-610D-4530-B0E8-1E86B60EE432}" type="datetimeFigureOut">
               <a:rPr lang="en-US" smtClean="0"/>
-              <a:t>8/5/2025</a:t>
+              <a:t>8/7/2025</a:t>
             </a:fld>
-            <a:endParaRPr lang="en-US"/>
+            <a:endParaRPr lang="en-US" dirty="0"/>
           </a:p>
         </p:txBody>
       </p:sp>
@@ -522,7 +585,7 @@
           <a:bodyPr/>
           <a:lstStyle/>
           <a:p>
-            <a:endParaRPr lang="en-US"/>
+            <a:endParaRPr lang="en-US" dirty="0"/>
           </a:p>
         </p:txBody>
       </p:sp>
@@ -551,7 +614,7 @@
               <a:rPr lang="en-US" smtClean="0"/>
               <a:t>‹#›</a:t>
             </a:fld>
-            <a:endParaRPr lang="en-US"/>
+            <a:endParaRPr lang="en-US" dirty="0"/>
           </a:p>
         </p:txBody>
       </p:sp>
@@ -693,9 +756,9 @@
           <a:p>
             <a:fld id="{6A1665DE-610D-4530-B0E8-1E86B60EE432}" type="datetimeFigureOut">
               <a:rPr lang="en-US" smtClean="0"/>
-              <a:t>8/5/2025</a:t>
+              <a:t>8/7/2025</a:t>
             </a:fld>
-            <a:endParaRPr lang="en-US"/>
+            <a:endParaRPr lang="en-US" dirty="0"/>
           </a:p>
         </p:txBody>
       </p:sp>
@@ -720,7 +783,7 @@
           <a:bodyPr/>
           <a:lstStyle/>
           <a:p>
-            <a:endParaRPr lang="en-US"/>
+            <a:endParaRPr lang="en-US" dirty="0"/>
           </a:p>
         </p:txBody>
       </p:sp>
@@ -749,7 +812,7 @@
               <a:rPr lang="en-US" smtClean="0"/>
               <a:t>‹#›</a:t>
             </a:fld>
-            <a:endParaRPr lang="en-US"/>
+            <a:endParaRPr lang="en-US" dirty="0"/>
           </a:p>
         </p:txBody>
       </p:sp>
@@ -901,9 +964,9 @@
           <a:p>
             <a:fld id="{6A1665DE-610D-4530-B0E8-1E86B60EE432}" type="datetimeFigureOut">
               <a:rPr lang="en-US" smtClean="0"/>
-              <a:t>8/5/2025</a:t>
+              <a:t>8/7/2025</a:t>
             </a:fld>
-            <a:endParaRPr lang="en-US"/>
+            <a:endParaRPr lang="en-US" dirty="0"/>
           </a:p>
         </p:txBody>
       </p:sp>
@@ -928,7 +991,7 @@
           <a:bodyPr/>
           <a:lstStyle/>
           <a:p>
-            <a:endParaRPr lang="en-US"/>
+            <a:endParaRPr lang="en-US" dirty="0"/>
           </a:p>
         </p:txBody>
       </p:sp>
@@ -957,7 +1020,7 @@
               <a:rPr lang="en-US" smtClean="0"/>
               <a:t>‹#›</a:t>
             </a:fld>
-            <a:endParaRPr lang="en-US"/>
+            <a:endParaRPr lang="en-US" dirty="0"/>
           </a:p>
         </p:txBody>
       </p:sp>
@@ -1099,9 +1162,9 @@
           <a:p>
             <a:fld id="{6A1665DE-610D-4530-B0E8-1E86B60EE432}" type="datetimeFigureOut">
               <a:rPr lang="en-US" smtClean="0"/>
-              <a:t>8/5/2025</a:t>
+              <a:t>8/7/2025</a:t>
             </a:fld>
-            <a:endParaRPr lang="en-US"/>
+            <a:endParaRPr lang="en-US" dirty="0"/>
           </a:p>
         </p:txBody>
       </p:sp>
@@ -1126,7 +1189,7 @@
           <a:bodyPr/>
           <a:lstStyle/>
           <a:p>
-            <a:endParaRPr lang="en-US"/>
+            <a:endParaRPr lang="en-US" dirty="0"/>
           </a:p>
         </p:txBody>
       </p:sp>
@@ -1155,7 +1218,7 @@
               <a:rPr lang="en-US" smtClean="0"/>
               <a:t>‹#›</a:t>
             </a:fld>
-            <a:endParaRPr lang="en-US"/>
+            <a:endParaRPr lang="en-US" dirty="0"/>
           </a:p>
         </p:txBody>
       </p:sp>
@@ -1374,9 +1437,9 @@
           <a:p>
             <a:fld id="{6A1665DE-610D-4530-B0E8-1E86B60EE432}" type="datetimeFigureOut">
               <a:rPr lang="en-US" smtClean="0"/>
-              <a:t>8/5/2025</a:t>
+              <a:t>8/7/2025</a:t>
             </a:fld>
-            <a:endParaRPr lang="en-US"/>
+            <a:endParaRPr lang="en-US" dirty="0"/>
           </a:p>
         </p:txBody>
       </p:sp>
@@ -1401,7 +1464,7 @@
           <a:bodyPr/>
           <a:lstStyle/>
           <a:p>
-            <a:endParaRPr lang="en-US"/>
+            <a:endParaRPr lang="en-US" dirty="0"/>
           </a:p>
         </p:txBody>
       </p:sp>
@@ -1430,7 +1493,7 @@
               <a:rPr lang="en-US" smtClean="0"/>
               <a:t>‹#›</a:t>
             </a:fld>
-            <a:endParaRPr lang="en-US"/>
+            <a:endParaRPr lang="en-US" dirty="0"/>
           </a:p>
         </p:txBody>
       </p:sp>
@@ -1639,9 +1702,9 @@
           <a:p>
             <a:fld id="{6A1665DE-610D-4530-B0E8-1E86B60EE432}" type="datetimeFigureOut">
               <a:rPr lang="en-US" smtClean="0"/>
-              <a:t>8/5/2025</a:t>
+              <a:t>8/7/2025</a:t>
             </a:fld>
-            <a:endParaRPr lang="en-US"/>
+            <a:endParaRPr lang="en-US" dirty="0"/>
           </a:p>
         </p:txBody>
       </p:sp>
@@ -1666,7 +1729,7 @@
           <a:bodyPr/>
           <a:lstStyle/>
           <a:p>
-            <a:endParaRPr lang="en-US"/>
+            <a:endParaRPr lang="en-US" dirty="0"/>
           </a:p>
         </p:txBody>
       </p:sp>
@@ -1695,7 +1758,7 @@
               <a:rPr lang="en-US" smtClean="0"/>
               <a:t>‹#›</a:t>
             </a:fld>
-            <a:endParaRPr lang="en-US"/>
+            <a:endParaRPr lang="en-US" dirty="0"/>
           </a:p>
         </p:txBody>
       </p:sp>
@@ -2051,9 +2114,9 @@
           <a:p>
             <a:fld id="{6A1665DE-610D-4530-B0E8-1E86B60EE432}" type="datetimeFigureOut">
               <a:rPr lang="en-US" smtClean="0"/>
-              <a:t>8/5/2025</a:t>
+              <a:t>8/7/2025</a:t>
             </a:fld>
-            <a:endParaRPr lang="en-US"/>
+            <a:endParaRPr lang="en-US" dirty="0"/>
           </a:p>
         </p:txBody>
       </p:sp>
@@ -2078,7 +2141,7 @@
           <a:bodyPr/>
           <a:lstStyle/>
           <a:p>
-            <a:endParaRPr lang="en-US"/>
+            <a:endParaRPr lang="en-US" dirty="0"/>
           </a:p>
         </p:txBody>
       </p:sp>
@@ -2107,7 +2170,7 @@
               <a:rPr lang="en-US" smtClean="0"/>
               <a:t>‹#›</a:t>
             </a:fld>
-            <a:endParaRPr lang="en-US"/>
+            <a:endParaRPr lang="en-US" dirty="0"/>
           </a:p>
         </p:txBody>
       </p:sp>
@@ -2192,9 +2255,9 @@
           <a:p>
             <a:fld id="{6A1665DE-610D-4530-B0E8-1E86B60EE432}" type="datetimeFigureOut">
               <a:rPr lang="en-US" smtClean="0"/>
-              <a:t>8/5/2025</a:t>
+              <a:t>8/7/2025</a:t>
             </a:fld>
-            <a:endParaRPr lang="en-US"/>
+            <a:endParaRPr lang="en-US" dirty="0"/>
           </a:p>
         </p:txBody>
       </p:sp>
@@ -2219,7 +2282,7 @@
           <a:bodyPr/>
           <a:lstStyle/>
           <a:p>
-            <a:endParaRPr lang="en-US"/>
+            <a:endParaRPr lang="en-US" dirty="0"/>
           </a:p>
         </p:txBody>
       </p:sp>
@@ -2248,7 +2311,7 @@
               <a:rPr lang="en-US" smtClean="0"/>
               <a:t>‹#›</a:t>
             </a:fld>
-            <a:endParaRPr lang="en-US"/>
+            <a:endParaRPr lang="en-US" dirty="0"/>
           </a:p>
         </p:txBody>
       </p:sp>
@@ -2305,9 +2368,9 @@
           <a:p>
             <a:fld id="{6A1665DE-610D-4530-B0E8-1E86B60EE432}" type="datetimeFigureOut">
               <a:rPr lang="en-US" smtClean="0"/>
-              <a:t>8/5/2025</a:t>
+              <a:t>8/7/2025</a:t>
             </a:fld>
-            <a:endParaRPr lang="en-US"/>
+            <a:endParaRPr lang="en-US" dirty="0"/>
           </a:p>
         </p:txBody>
       </p:sp>
@@ -2332,7 +2395,7 @@
           <a:bodyPr/>
           <a:lstStyle/>
           <a:p>
-            <a:endParaRPr lang="en-US"/>
+            <a:endParaRPr lang="en-US" dirty="0"/>
           </a:p>
         </p:txBody>
       </p:sp>
@@ -2361,7 +2424,7 @@
               <a:rPr lang="en-US" smtClean="0"/>
               <a:t>‹#›</a:t>
             </a:fld>
-            <a:endParaRPr lang="en-US"/>
+            <a:endParaRPr lang="en-US" dirty="0"/>
           </a:p>
         </p:txBody>
       </p:sp>
@@ -2616,9 +2679,9 @@
           <a:p>
             <a:fld id="{6A1665DE-610D-4530-B0E8-1E86B60EE432}" type="datetimeFigureOut">
               <a:rPr lang="en-US" smtClean="0"/>
-              <a:t>8/5/2025</a:t>
+              <a:t>8/7/2025</a:t>
             </a:fld>
-            <a:endParaRPr lang="en-US"/>
+            <a:endParaRPr lang="en-US" dirty="0"/>
           </a:p>
         </p:txBody>
       </p:sp>
@@ -2643,7 +2706,7 @@
           <a:bodyPr/>
           <a:lstStyle/>
           <a:p>
-            <a:endParaRPr lang="en-US"/>
+            <a:endParaRPr lang="en-US" dirty="0"/>
           </a:p>
         </p:txBody>
       </p:sp>
@@ -2672,7 +2735,7 @@
               <a:rPr lang="en-US" smtClean="0"/>
               <a:t>‹#›</a:t>
             </a:fld>
-            <a:endParaRPr lang="en-US"/>
+            <a:endParaRPr lang="en-US" dirty="0"/>
           </a:p>
         </p:txBody>
       </p:sp>
@@ -2806,7 +2869,7 @@
             </a:lvl9pPr>
           </a:lstStyle>
           <a:p>
-            <a:endParaRPr lang="en-US"/>
+            <a:endParaRPr lang="en-US" dirty="0"/>
           </a:p>
         </p:txBody>
       </p:sp>
@@ -2904,9 +2967,9 @@
           <a:p>
             <a:fld id="{6A1665DE-610D-4530-B0E8-1E86B60EE432}" type="datetimeFigureOut">
               <a:rPr lang="en-US" smtClean="0"/>
-              <a:t>8/5/2025</a:t>
+              <a:t>8/7/2025</a:t>
             </a:fld>
-            <a:endParaRPr lang="en-US"/>
+            <a:endParaRPr lang="en-US" dirty="0"/>
           </a:p>
         </p:txBody>
       </p:sp>
@@ -2931,7 +2994,7 @@
           <a:bodyPr/>
           <a:lstStyle/>
           <a:p>
-            <a:endParaRPr lang="en-US"/>
+            <a:endParaRPr lang="en-US" dirty="0"/>
           </a:p>
         </p:txBody>
       </p:sp>
@@ -2960,7 +3023,7 @@
               <a:rPr lang="en-US" smtClean="0"/>
               <a:t>‹#›</a:t>
             </a:fld>
-            <a:endParaRPr lang="en-US"/>
+            <a:endParaRPr lang="en-US" dirty="0"/>
           </a:p>
         </p:txBody>
       </p:sp>
@@ -3145,9 +3208,9 @@
           <a:p>
             <a:fld id="{6A1665DE-610D-4530-B0E8-1E86B60EE432}" type="datetimeFigureOut">
               <a:rPr lang="en-US" smtClean="0"/>
-              <a:t>8/5/2025</a:t>
+              <a:t>8/7/2025</a:t>
             </a:fld>
-            <a:endParaRPr lang="en-US"/>
+            <a:endParaRPr lang="en-US" dirty="0"/>
           </a:p>
         </p:txBody>
       </p:sp>
@@ -3190,7 +3253,7 @@
             </a:lvl1pPr>
           </a:lstStyle>
           <a:p>
-            <a:endParaRPr lang="en-US"/>
+            <a:endParaRPr lang="en-US" dirty="0"/>
           </a:p>
         </p:txBody>
       </p:sp>
@@ -3237,7 +3300,7 @@
               <a:rPr lang="en-US" smtClean="0"/>
               <a:t>‹#›</a:t>
             </a:fld>
-            <a:endParaRPr lang="en-US"/>
+            <a:endParaRPr lang="en-US" dirty="0"/>
           </a:p>
         </p:txBody>
       </p:sp>
@@ -3562,56 +3625,20 @@
           <a:chExt cx="0" cy="0"/>
         </a:xfrm>
       </p:grpSpPr>
-      <p:pic>
-        <p:nvPicPr>
-          <p:cNvPr id="57" name="Picture 56" descr="Diagram of a diagram of a slope&#10;&#10;AI-generated content may be incorrect.">
-            <a:extLst>
-              <a:ext uri="{FF2B5EF4-FFF2-40B4-BE49-F238E27FC236}">
-                <a16:creationId xmlns:a16="http://schemas.microsoft.com/office/drawing/2014/main" id="{42DAAB27-0A38-D061-6D76-4426721EC058}"/>
-              </a:ext>
-            </a:extLst>
-          </p:cNvPr>
-          <p:cNvPicPr>
-            <a:picLocks noChangeAspect="1"/>
-          </p:cNvPicPr>
-          <p:nvPr/>
-        </p:nvPicPr>
-        <p:blipFill>
-          <a:blip r:embed="rId2">
-            <a:extLst>
-              <a:ext uri="{28A0092B-C50C-407E-A947-70E740481C1C}">
-                <a14:useLocalDpi xmlns:a14="http://schemas.microsoft.com/office/drawing/2010/main" val="0"/>
-              </a:ext>
-            </a:extLst>
-          </a:blip>
-          <a:stretch>
-            <a:fillRect/>
-          </a:stretch>
-        </p:blipFill>
-        <p:spPr>
-          <a:xfrm>
-            <a:off x="6299200" y="2709947"/>
-            <a:ext cx="5895213" cy="4133585"/>
-          </a:xfrm>
-          <a:prstGeom prst="rect">
-            <a:avLst/>
-          </a:prstGeom>
-        </p:spPr>
-      </p:pic>
-      <p:sp>
-        <p:nvSpPr>
-          <p:cNvPr id="2" name="Title 1">
-            <a:extLst>
-              <a:ext uri="{FF2B5EF4-FFF2-40B4-BE49-F238E27FC236}">
-                <a16:creationId xmlns:a16="http://schemas.microsoft.com/office/drawing/2014/main" id="{4B0907F7-AEFF-FB05-E679-83F424333970}"/>
-              </a:ext>
-            </a:extLst>
-          </p:cNvPr>
-          <p:cNvSpPr>
-            <a:spLocks noGrp="1"/>
-          </p:cNvSpPr>
-          <p:nvPr>
-            <p:ph type="title"/>
+      <p:sp>
+        <p:nvSpPr>
+          <p:cNvPr id="3" name="Subtitle 2">
+            <a:extLst>
+              <a:ext uri="{FF2B5EF4-FFF2-40B4-BE49-F238E27FC236}">
+                <a16:creationId xmlns:a16="http://schemas.microsoft.com/office/drawing/2014/main" id="{051151B1-963A-48D1-8703-9ED36F1E0F31}"/>
+              </a:ext>
+            </a:extLst>
+          </p:cNvPr>
+          <p:cNvSpPr>
+            <a:spLocks noGrp="1"/>
+          </p:cNvSpPr>
+          <p:nvPr>
+            <p:ph type="subTitle" idx="1"/>
           </p:nvPr>
         </p:nvSpPr>
         <p:spPr/>
@@ -3619,130 +3646,14 @@
           <a:bodyPr/>
           <a:lstStyle/>
           <a:p>
-            <a:r>
-              <a:rPr lang="en-US" dirty="0"/>
-              <a:t>What I used in data</a:t>
-            </a:r>
-          </a:p>
-        </p:txBody>
-      </p:sp>
-      <p:sp>
-        <p:nvSpPr>
-          <p:cNvPr id="4" name="TextBox 3">
-            <a:extLst>
-              <a:ext uri="{FF2B5EF4-FFF2-40B4-BE49-F238E27FC236}">
-                <a16:creationId xmlns:a16="http://schemas.microsoft.com/office/drawing/2014/main" id="{2BD3A76B-5F0D-0D88-2A56-9C0AD1890B7D}"/>
-              </a:ext>
-            </a:extLst>
-          </p:cNvPr>
-          <p:cNvSpPr txBox="1"/>
-          <p:nvPr/>
-        </p:nvSpPr>
-        <p:spPr>
-          <a:xfrm>
-            <a:off x="838200" y="2478083"/>
-            <a:ext cx="5772912" cy="1200329"/>
-          </a:xfrm>
-          <a:prstGeom prst="rect">
-            <a:avLst/>
-          </a:prstGeom>
-          <a:noFill/>
-        </p:spPr>
-        <p:txBody>
-          <a:bodyPr wrap="square" rtlCol="0">
-            <a:spAutoFit/>
-          </a:bodyPr>
-          <a:lstStyle/>
-          <a:p>
-            <a:r>
-              <a:rPr lang="en-US" dirty="0"/>
-              <a:t>TIME</a:t>
-            </a:r>
-          </a:p>
-          <a:p>
-            <a:r>
-              <a:rPr lang="en-US" dirty="0"/>
-              <a:t>TSRC0 TSRC1 TSRC2 TSRC3 : the observing temperature </a:t>
-            </a:r>
-          </a:p>
-          <a:p>
-            <a:r>
-              <a:rPr lang="en-US" dirty="0"/>
-              <a:t>EL </a:t>
-            </a:r>
-          </a:p>
-          <a:p>
-            <a:r>
-              <a:rPr lang="en-US" dirty="0"/>
-              <a:t>AZ</a:t>
-            </a:r>
-          </a:p>
-        </p:txBody>
-      </p:sp>
-      <p:sp>
-        <p:nvSpPr>
-          <p:cNvPr id="58" name="TextBox 57">
-            <a:extLst>
-              <a:ext uri="{FF2B5EF4-FFF2-40B4-BE49-F238E27FC236}">
-                <a16:creationId xmlns:a16="http://schemas.microsoft.com/office/drawing/2014/main" id="{DBE34FB4-BAD2-8F79-8931-F8CCCE6A3966}"/>
-              </a:ext>
-            </a:extLst>
-          </p:cNvPr>
-          <p:cNvSpPr txBox="1"/>
-          <p:nvPr/>
-        </p:nvSpPr>
-        <p:spPr>
-          <a:xfrm>
-            <a:off x="838200" y="1622720"/>
-            <a:ext cx="8652818" cy="523220"/>
-          </a:xfrm>
-          <a:prstGeom prst="rect">
-            <a:avLst/>
-          </a:prstGeom>
-          <a:noFill/>
-          <a:ln>
-            <a:solidFill>
-              <a:schemeClr val="tx1"/>
-            </a:solidFill>
-          </a:ln>
-        </p:spPr>
-        <p:txBody>
-          <a:bodyPr wrap="none" rtlCol="0">
-            <a:spAutoFit/>
-          </a:bodyPr>
-          <a:lstStyle/>
-          <a:p>
-            <a:r>
-              <a:rPr lang="en-US" sz="1400" b="1" dirty="0">
-                <a:solidFill>
-                  <a:schemeClr val="bg1"/>
-                </a:solidFill>
-                <a:highlight>
-                  <a:srgbClr val="000000"/>
-                </a:highlight>
-              </a:rPr>
-              <a:t>TIME …… TSRC0 TSRC1 TSRC2 TSRC3 EL AZ</a:t>
-            </a:r>
-          </a:p>
-          <a:p>
-            <a:r>
-              <a:rPr lang="en-US" sz="1400" b="1" dirty="0">
-                <a:solidFill>
-                  <a:schemeClr val="bg1"/>
-                </a:solidFill>
-                <a:highlight>
-                  <a:srgbClr val="000000"/>
-                </a:highlight>
-              </a:rPr>
-              <a:t>2024-06-12T19:01:36.642127 …… 64.9747390747 34.9560852051 21.7463874817 16.6668453217 55.0 2.625</a:t>
-            </a:r>
+            <a:endParaRPr lang="en-US" dirty="0"/>
           </a:p>
         </p:txBody>
       </p:sp>
     </p:spTree>
     <p:extLst>
       <p:ext uri="{BB962C8B-B14F-4D97-AF65-F5344CB8AC3E}">
-        <p14:creationId xmlns:p14="http://schemas.microsoft.com/office/powerpoint/2010/main" val="1445132654"/>
+        <p14:creationId xmlns:p14="http://schemas.microsoft.com/office/powerpoint/2010/main" val="3652979441"/>
       </p:ext>
     </p:extLst>
   </p:cSld>
@@ -3753,1472 +3664,6 @@
 </file>
 
 <file path=ppt/slides/slide10.xml><?xml version="1.0" encoding="utf-8"?>
-<p:sld xmlns:a="http://schemas.openxmlformats.org/drawingml/2006/main" xmlns:r="http://schemas.openxmlformats.org/officeDocument/2006/relationships" xmlns:p="http://schemas.openxmlformats.org/presentationml/2006/main">
-  <p:cSld>
-    <p:spTree>
-      <p:nvGrpSpPr>
-        <p:cNvPr id="1" name=""/>
-        <p:cNvGrpSpPr/>
-        <p:nvPr/>
-      </p:nvGrpSpPr>
-      <p:grpSpPr>
-        <a:xfrm>
-          <a:off x="0" y="0"/>
-          <a:ext cx="0" cy="0"/>
-          <a:chOff x="0" y="0"/>
-          <a:chExt cx="0" cy="0"/>
-        </a:xfrm>
-      </p:grpSpPr>
-      <p:sp>
-        <p:nvSpPr>
-          <p:cNvPr id="2" name="Title 1">
-            <a:extLst>
-              <a:ext uri="{FF2B5EF4-FFF2-40B4-BE49-F238E27FC236}">
-                <a16:creationId xmlns:a16="http://schemas.microsoft.com/office/drawing/2014/main" id="{F68BAF7A-6AB3-A46A-5A82-FE72F666373D}"/>
-              </a:ext>
-            </a:extLst>
-          </p:cNvPr>
-          <p:cNvSpPr>
-            <a:spLocks noGrp="1"/>
-          </p:cNvSpPr>
-          <p:nvPr>
-            <p:ph type="title"/>
-          </p:nvPr>
-        </p:nvSpPr>
-        <p:spPr/>
-        <p:txBody>
-          <a:bodyPr/>
-          <a:lstStyle/>
-          <a:p>
-            <a:endParaRPr lang="en-US"/>
-          </a:p>
-        </p:txBody>
-      </p:sp>
-      <p:sp>
-        <p:nvSpPr>
-          <p:cNvPr id="3" name="Content Placeholder 2">
-            <a:extLst>
-              <a:ext uri="{FF2B5EF4-FFF2-40B4-BE49-F238E27FC236}">
-                <a16:creationId xmlns:a16="http://schemas.microsoft.com/office/drawing/2014/main" id="{EE34964C-1CE2-D710-CD00-BDB8FCFC122D}"/>
-              </a:ext>
-            </a:extLst>
-          </p:cNvPr>
-          <p:cNvSpPr>
-            <a:spLocks noGrp="1"/>
-          </p:cNvSpPr>
-          <p:nvPr>
-            <p:ph idx="1"/>
-          </p:nvPr>
-        </p:nvSpPr>
-        <p:spPr/>
-        <p:txBody>
-          <a:bodyPr/>
-          <a:lstStyle/>
-          <a:p>
-            <a:endParaRPr lang="en-US"/>
-          </a:p>
-        </p:txBody>
-      </p:sp>
-      <p:pic>
-        <p:nvPicPr>
-          <p:cNvPr id="7" name="Picture 6">
-            <a:extLst>
-              <a:ext uri="{FF2B5EF4-FFF2-40B4-BE49-F238E27FC236}">
-                <a16:creationId xmlns:a16="http://schemas.microsoft.com/office/drawing/2014/main" id="{33F8D6B7-1BC3-AC3E-CF78-1067EAB31B38}"/>
-              </a:ext>
-            </a:extLst>
-          </p:cNvPr>
-          <p:cNvPicPr>
-            <a:picLocks noChangeAspect="1"/>
-          </p:cNvPicPr>
-          <p:nvPr/>
-        </p:nvPicPr>
-        <p:blipFill>
-          <a:blip r:embed="rId2"/>
-          <a:stretch>
-            <a:fillRect/>
-          </a:stretch>
-        </p:blipFill>
-        <p:spPr>
-          <a:xfrm>
-            <a:off x="82296" y="520678"/>
-            <a:ext cx="12027408" cy="5816644"/>
-          </a:xfrm>
-          <a:prstGeom prst="rect">
-            <a:avLst/>
-          </a:prstGeom>
-        </p:spPr>
-      </p:pic>
-    </p:spTree>
-    <p:extLst>
-      <p:ext uri="{BB962C8B-B14F-4D97-AF65-F5344CB8AC3E}">
-        <p14:creationId xmlns:p14="http://schemas.microsoft.com/office/powerpoint/2010/main" val="386364837"/>
-      </p:ext>
-    </p:extLst>
-  </p:cSld>
-  <p:clrMapOvr>
-    <a:masterClrMapping/>
-  </p:clrMapOvr>
-</p:sld>
-</file>
-
-<file path=ppt/slides/slide11.xml><?xml version="1.0" encoding="utf-8"?>
-<p:sld xmlns:a="http://schemas.openxmlformats.org/drawingml/2006/main" xmlns:r="http://schemas.openxmlformats.org/officeDocument/2006/relationships" xmlns:p="http://schemas.openxmlformats.org/presentationml/2006/main">
-  <p:cSld>
-    <p:spTree>
-      <p:nvGrpSpPr>
-        <p:cNvPr id="1" name=""/>
-        <p:cNvGrpSpPr/>
-        <p:nvPr/>
-      </p:nvGrpSpPr>
-      <p:grpSpPr>
-        <a:xfrm>
-          <a:off x="0" y="0"/>
-          <a:ext cx="0" cy="0"/>
-          <a:chOff x="0" y="0"/>
-          <a:chExt cx="0" cy="0"/>
-        </a:xfrm>
-      </p:grpSpPr>
-      <p:sp>
-        <p:nvSpPr>
-          <p:cNvPr id="2" name="Title 1">
-            <a:extLst>
-              <a:ext uri="{FF2B5EF4-FFF2-40B4-BE49-F238E27FC236}">
-                <a16:creationId xmlns:a16="http://schemas.microsoft.com/office/drawing/2014/main" id="{9A1E5E34-09FD-758A-A268-98D8E408EB40}"/>
-              </a:ext>
-            </a:extLst>
-          </p:cNvPr>
-          <p:cNvSpPr>
-            <a:spLocks noGrp="1"/>
-          </p:cNvSpPr>
-          <p:nvPr>
-            <p:ph type="title"/>
-          </p:nvPr>
-        </p:nvSpPr>
-        <p:spPr/>
-        <p:txBody>
-          <a:bodyPr/>
-          <a:lstStyle/>
-          <a:p>
-            <a:r>
-              <a:rPr lang="en-US" dirty="0" err="1"/>
-              <a:t>amr</a:t>
-            </a:r>
-            <a:r>
-              <a:rPr lang="en-US" dirty="0"/>
-              <a:t> or </a:t>
-            </a:r>
-            <a:r>
-              <a:rPr lang="en-US" dirty="0" err="1"/>
-              <a:t>ams</a:t>
-            </a:r>
-            <a:r>
-              <a:rPr lang="en-US" dirty="0"/>
-              <a:t> ?</a:t>
-            </a:r>
-          </a:p>
-        </p:txBody>
-      </p:sp>
-    </p:spTree>
-    <p:extLst>
-      <p:ext uri="{BB962C8B-B14F-4D97-AF65-F5344CB8AC3E}">
-        <p14:creationId xmlns:p14="http://schemas.microsoft.com/office/powerpoint/2010/main" val="2628858481"/>
-      </p:ext>
-    </p:extLst>
-  </p:cSld>
-  <p:clrMapOvr>
-    <a:masterClrMapping/>
-  </p:clrMapOvr>
-</p:sld>
-</file>
-
-<file path=ppt/slides/slide12.xml><?xml version="1.0" encoding="utf-8"?>
-<p:sld xmlns:a="http://schemas.openxmlformats.org/drawingml/2006/main" xmlns:r="http://schemas.openxmlformats.org/officeDocument/2006/relationships" xmlns:p="http://schemas.openxmlformats.org/presentationml/2006/main">
-  <p:cSld>
-    <p:spTree>
-      <p:nvGrpSpPr>
-        <p:cNvPr id="1" name=""/>
-        <p:cNvGrpSpPr/>
-        <p:nvPr/>
-      </p:nvGrpSpPr>
-      <p:grpSpPr>
-        <a:xfrm>
-          <a:off x="0" y="0"/>
-          <a:ext cx="0" cy="0"/>
-          <a:chOff x="0" y="0"/>
-          <a:chExt cx="0" cy="0"/>
-        </a:xfrm>
-      </p:grpSpPr>
-      <p:pic>
-        <p:nvPicPr>
-          <p:cNvPr id="11" name="Picture 10" descr="A graph with a blue line&#10;&#10;AI-generated content may be incorrect.">
-            <a:extLst>
-              <a:ext uri="{FF2B5EF4-FFF2-40B4-BE49-F238E27FC236}">
-                <a16:creationId xmlns:a16="http://schemas.microsoft.com/office/drawing/2014/main" id="{59757404-A945-B2FF-6C8D-EF85195E8545}"/>
-              </a:ext>
-            </a:extLst>
-          </p:cNvPr>
-          <p:cNvPicPr>
-            <a:picLocks noChangeAspect="1"/>
-          </p:cNvPicPr>
-          <p:nvPr/>
-        </p:nvPicPr>
-        <p:blipFill>
-          <a:blip r:embed="rId2">
-            <a:extLst>
-              <a:ext uri="{28A0092B-C50C-407E-A947-70E740481C1C}">
-                <a14:useLocalDpi xmlns:a14="http://schemas.microsoft.com/office/drawing/2010/main" val="0"/>
-              </a:ext>
-            </a:extLst>
-          </a:blip>
-          <a:srcRect l="8230" t="7084" b="6458"/>
-          <a:stretch>
-            <a:fillRect/>
-          </a:stretch>
-        </p:blipFill>
-        <p:spPr>
-          <a:xfrm>
-            <a:off x="175867" y="1587500"/>
-            <a:ext cx="11188700" cy="5270500"/>
-          </a:xfrm>
-          <a:prstGeom prst="rect">
-            <a:avLst/>
-          </a:prstGeom>
-        </p:spPr>
-      </p:pic>
-      <p:pic>
-        <p:nvPicPr>
-          <p:cNvPr id="16" name="Picture 15">
-            <a:extLst>
-              <a:ext uri="{FF2B5EF4-FFF2-40B4-BE49-F238E27FC236}">
-                <a16:creationId xmlns:a16="http://schemas.microsoft.com/office/drawing/2014/main" id="{A5E023AE-600F-0B58-AA52-36832140E8FD}"/>
-              </a:ext>
-            </a:extLst>
-          </p:cNvPr>
-          <p:cNvPicPr>
-            <a:picLocks noChangeAspect="1"/>
-          </p:cNvPicPr>
-          <p:nvPr/>
-        </p:nvPicPr>
-        <p:blipFill>
-          <a:blip r:embed="rId3"/>
-          <a:stretch>
-            <a:fillRect/>
-          </a:stretch>
-        </p:blipFill>
-        <p:spPr>
-          <a:xfrm>
-            <a:off x="6362701" y="0"/>
-            <a:ext cx="5829300" cy="6225271"/>
-          </a:xfrm>
-          <a:prstGeom prst="rect">
-            <a:avLst/>
-          </a:prstGeom>
-        </p:spPr>
-      </p:pic>
-    </p:spTree>
-    <p:extLst>
-      <p:ext uri="{BB962C8B-B14F-4D97-AF65-F5344CB8AC3E}">
-        <p14:creationId xmlns:p14="http://schemas.microsoft.com/office/powerpoint/2010/main" val="316432251"/>
-      </p:ext>
-    </p:extLst>
-  </p:cSld>
-  <p:clrMapOvr>
-    <a:masterClrMapping/>
-  </p:clrMapOvr>
-</p:sld>
-</file>
-
-<file path=ppt/slides/slide13.xml><?xml version="1.0" encoding="utf-8"?>
-<p:sld xmlns:a="http://schemas.openxmlformats.org/drawingml/2006/main" xmlns:r="http://schemas.openxmlformats.org/officeDocument/2006/relationships" xmlns:p="http://schemas.openxmlformats.org/presentationml/2006/main">
-  <p:cSld>
-    <p:spTree>
-      <p:nvGrpSpPr>
-        <p:cNvPr id="1" name=""/>
-        <p:cNvGrpSpPr/>
-        <p:nvPr/>
-      </p:nvGrpSpPr>
-      <p:grpSpPr>
-        <a:xfrm>
-          <a:off x="0" y="0"/>
-          <a:ext cx="0" cy="0"/>
-          <a:chOff x="0" y="0"/>
-          <a:chExt cx="0" cy="0"/>
-        </a:xfrm>
-      </p:grpSpPr>
-      <p:sp>
-        <p:nvSpPr>
-          <p:cNvPr id="2" name="Title 1">
-            <a:extLst>
-              <a:ext uri="{FF2B5EF4-FFF2-40B4-BE49-F238E27FC236}">
-                <a16:creationId xmlns:a16="http://schemas.microsoft.com/office/drawing/2014/main" id="{7C1A6132-B24A-609A-123B-246914648A23}"/>
-              </a:ext>
-            </a:extLst>
-          </p:cNvPr>
-          <p:cNvSpPr>
-            <a:spLocks noGrp="1"/>
-          </p:cNvSpPr>
-          <p:nvPr>
-            <p:ph type="title"/>
-          </p:nvPr>
-        </p:nvSpPr>
-        <p:spPr/>
-        <p:txBody>
-          <a:bodyPr/>
-          <a:lstStyle/>
-          <a:p>
-            <a:r>
-              <a:rPr lang="en-US" dirty="0"/>
-              <a:t>other seasons?</a:t>
-            </a:r>
-          </a:p>
-        </p:txBody>
-      </p:sp>
-      <p:sp>
-        <p:nvSpPr>
-          <p:cNvPr id="3" name="Content Placeholder 2">
-            <a:extLst>
-              <a:ext uri="{FF2B5EF4-FFF2-40B4-BE49-F238E27FC236}">
-                <a16:creationId xmlns:a16="http://schemas.microsoft.com/office/drawing/2014/main" id="{871BF6AE-135B-11C0-217A-22281C7B7C08}"/>
-              </a:ext>
-            </a:extLst>
-          </p:cNvPr>
-          <p:cNvSpPr>
-            <a:spLocks noGrp="1"/>
-          </p:cNvSpPr>
-          <p:nvPr>
-            <p:ph idx="1"/>
-          </p:nvPr>
-        </p:nvSpPr>
-        <p:spPr/>
-        <p:txBody>
-          <a:bodyPr/>
-          <a:lstStyle/>
-          <a:p>
-            <a:endParaRPr lang="en-US"/>
-          </a:p>
-        </p:txBody>
-      </p:sp>
-    </p:spTree>
-    <p:extLst>
-      <p:ext uri="{BB962C8B-B14F-4D97-AF65-F5344CB8AC3E}">
-        <p14:creationId xmlns:p14="http://schemas.microsoft.com/office/powerpoint/2010/main" val="2901692745"/>
-      </p:ext>
-    </p:extLst>
-  </p:cSld>
-  <p:clrMapOvr>
-    <a:masterClrMapping/>
-  </p:clrMapOvr>
-</p:sld>
-</file>
-
-<file path=ppt/slides/slide2.xml><?xml version="1.0" encoding="utf-8"?>
-<p:sld xmlns:a="http://schemas.openxmlformats.org/drawingml/2006/main" xmlns:r="http://schemas.openxmlformats.org/officeDocument/2006/relationships" xmlns:p="http://schemas.openxmlformats.org/presentationml/2006/main">
-  <p:cSld>
-    <p:spTree>
-      <p:nvGrpSpPr>
-        <p:cNvPr id="1" name=""/>
-        <p:cNvGrpSpPr/>
-        <p:nvPr/>
-      </p:nvGrpSpPr>
-      <p:grpSpPr>
-        <a:xfrm>
-          <a:off x="0" y="0"/>
-          <a:ext cx="0" cy="0"/>
-          <a:chOff x="0" y="0"/>
-          <a:chExt cx="0" cy="0"/>
-        </a:xfrm>
-      </p:grpSpPr>
-      <p:pic>
-        <p:nvPicPr>
-          <p:cNvPr id="6" name="Picture 5" descr="A black background with blue and white text&#10;&#10;AI-generated content may be incorrect.">
-            <a:extLst>
-              <a:ext uri="{FF2B5EF4-FFF2-40B4-BE49-F238E27FC236}">
-                <a16:creationId xmlns:a16="http://schemas.microsoft.com/office/drawing/2014/main" id="{6EB1CB07-4FD4-A0C2-3336-71A1D23C2CEC}"/>
-              </a:ext>
-            </a:extLst>
-          </p:cNvPr>
-          <p:cNvPicPr>
-            <a:picLocks noChangeAspect="1"/>
-          </p:cNvPicPr>
-          <p:nvPr/>
-        </p:nvPicPr>
-        <p:blipFill>
-          <a:blip r:embed="rId2"/>
-          <a:srcRect l="4316" t="48702" r="22797"/>
-          <a:stretch>
-            <a:fillRect/>
-          </a:stretch>
-        </p:blipFill>
-        <p:spPr>
-          <a:xfrm>
-            <a:off x="269506" y="1039527"/>
-            <a:ext cx="5707782" cy="705642"/>
-          </a:xfrm>
-          <a:prstGeom prst="rect">
-            <a:avLst/>
-          </a:prstGeom>
-        </p:spPr>
-      </p:pic>
-      <p:sp>
-        <p:nvSpPr>
-          <p:cNvPr id="7" name="TextBox 6">
-            <a:extLst>
-              <a:ext uri="{FF2B5EF4-FFF2-40B4-BE49-F238E27FC236}">
-                <a16:creationId xmlns:a16="http://schemas.microsoft.com/office/drawing/2014/main" id="{EAFC5FC2-9941-2E65-1DE0-31041B015040}"/>
-              </a:ext>
-            </a:extLst>
-          </p:cNvPr>
-          <p:cNvSpPr txBox="1"/>
-          <p:nvPr/>
-        </p:nvSpPr>
-        <p:spPr>
-          <a:xfrm>
-            <a:off x="173254" y="192505"/>
-            <a:ext cx="2293064" cy="705642"/>
-          </a:xfrm>
-          <a:prstGeom prst="rect">
-            <a:avLst/>
-          </a:prstGeom>
-        </p:spPr>
-        <p:txBody>
-          <a:bodyPr vert="horz" lIns="91440" tIns="45720" rIns="91440" bIns="45720" rtlCol="0" anchor="ctr">
-            <a:normAutofit/>
-          </a:bodyPr>
-          <a:lstStyle>
-            <a:lvl1pPr>
-              <a:lnSpc>
-                <a:spcPct val="90000"/>
-              </a:lnSpc>
-              <a:spcBef>
-                <a:spcPct val="0"/>
-              </a:spcBef>
-              <a:buNone/>
-              <a:defRPr sz="4400">
-                <a:latin typeface="+mj-lt"/>
-                <a:ea typeface="+mj-ea"/>
-                <a:cs typeface="+mj-cs"/>
-              </a:defRPr>
-            </a:lvl1pPr>
-          </a:lstStyle>
-          <a:p>
-            <a:r>
-              <a:rPr lang="en-US" dirty="0"/>
-              <a:t>am fitting</a:t>
-            </a:r>
-          </a:p>
-        </p:txBody>
-      </p:sp>
-      <p:pic>
-        <p:nvPicPr>
-          <p:cNvPr id="11" name="Picture 10">
-            <a:extLst>
-              <a:ext uri="{FF2B5EF4-FFF2-40B4-BE49-F238E27FC236}">
-                <a16:creationId xmlns:a16="http://schemas.microsoft.com/office/drawing/2014/main" id="{B3F0DFE5-A6DC-DE55-E727-98D622B10168}"/>
-              </a:ext>
-            </a:extLst>
-          </p:cNvPr>
-          <p:cNvPicPr>
-            <a:picLocks noChangeAspect="1"/>
-          </p:cNvPicPr>
-          <p:nvPr/>
-        </p:nvPicPr>
-        <p:blipFill>
-          <a:blip r:embed="rId3"/>
-          <a:stretch>
-            <a:fillRect/>
-          </a:stretch>
-        </p:blipFill>
-        <p:spPr>
-          <a:xfrm>
-            <a:off x="269506" y="2204183"/>
-            <a:ext cx="8564170" cy="2286319"/>
-          </a:xfrm>
-          <a:prstGeom prst="rect">
-            <a:avLst/>
-          </a:prstGeom>
-        </p:spPr>
-      </p:pic>
-      <p:sp>
-        <p:nvSpPr>
-          <p:cNvPr id="13" name="TextBox 12">
-            <a:extLst>
-              <a:ext uri="{FF2B5EF4-FFF2-40B4-BE49-F238E27FC236}">
-                <a16:creationId xmlns:a16="http://schemas.microsoft.com/office/drawing/2014/main" id="{F44E12F6-1DC6-57D8-8E13-F59581811CF3}"/>
-              </a:ext>
-            </a:extLst>
-          </p:cNvPr>
-          <p:cNvSpPr txBox="1"/>
-          <p:nvPr/>
-        </p:nvSpPr>
-        <p:spPr>
-          <a:xfrm>
-            <a:off x="6096000" y="975728"/>
-            <a:ext cx="486030" cy="769441"/>
-          </a:xfrm>
-          <a:prstGeom prst="rect">
-            <a:avLst/>
-          </a:prstGeom>
-          <a:noFill/>
-        </p:spPr>
-        <p:txBody>
-          <a:bodyPr wrap="none" rtlCol="0">
-            <a:spAutoFit/>
-          </a:bodyPr>
-          <a:lstStyle/>
-          <a:p>
-            <a:r>
-              <a:rPr lang="en-US" sz="4400" b="1" dirty="0"/>
-              <a:t>=</a:t>
-            </a:r>
-          </a:p>
-        </p:txBody>
-      </p:sp>
-      <p:sp>
-        <p:nvSpPr>
-          <p:cNvPr id="15" name="TextBox 14">
-            <a:extLst>
-              <a:ext uri="{FF2B5EF4-FFF2-40B4-BE49-F238E27FC236}">
-                <a16:creationId xmlns:a16="http://schemas.microsoft.com/office/drawing/2014/main" id="{3CCF37B7-A53B-2D02-0F99-150B3529D79C}"/>
-              </a:ext>
-            </a:extLst>
-          </p:cNvPr>
-          <p:cNvSpPr txBox="1"/>
-          <p:nvPr/>
-        </p:nvSpPr>
-        <p:spPr>
-          <a:xfrm>
-            <a:off x="269506" y="4775580"/>
-            <a:ext cx="10913606" cy="1569660"/>
-          </a:xfrm>
-          <a:prstGeom prst="rect">
-            <a:avLst/>
-          </a:prstGeom>
-          <a:noFill/>
-        </p:spPr>
-        <p:txBody>
-          <a:bodyPr wrap="square" rtlCol="0">
-            <a:spAutoFit/>
-          </a:bodyPr>
-          <a:lstStyle/>
-          <a:p>
-            <a:pPr lvl="0" eaLnBrk="0" fontAlgn="base" hangingPunct="0">
-              <a:spcBef>
-                <a:spcPct val="0"/>
-              </a:spcBef>
-              <a:spcAft>
-                <a:spcPct val="0"/>
-              </a:spcAft>
-            </a:pPr>
-            <a:r>
-              <a:rPr lang="en-US" altLang="en-US" sz="2400" dirty="0">
-                <a:latin typeface="Arial" panose="020B0604020202020204" pitchFamily="34" charset="0"/>
-              </a:rPr>
-              <a:t>The first warning seems to happen mostly in the mesosphere and stratosphere, rather than in the troposphere. Therefore, the </a:t>
-            </a:r>
-            <a:r>
-              <a:rPr lang="en-US" altLang="en-US" sz="2400" dirty="0" err="1">
-                <a:latin typeface="Arial" panose="020B0604020202020204" pitchFamily="34" charset="0"/>
-              </a:rPr>
-              <a:t>pwv</a:t>
-            </a:r>
-            <a:r>
-              <a:rPr lang="en-US" altLang="en-US" sz="2400" dirty="0">
-                <a:latin typeface="Arial" panose="020B0604020202020204" pitchFamily="34" charset="0"/>
-              </a:rPr>
-              <a:t> should have a very low influence.</a:t>
-            </a:r>
-          </a:p>
-          <a:p>
-            <a:pPr lvl="0" eaLnBrk="0" fontAlgn="base" hangingPunct="0">
-              <a:spcBef>
-                <a:spcPct val="0"/>
-              </a:spcBef>
-              <a:spcAft>
-                <a:spcPct val="0"/>
-              </a:spcAft>
-            </a:pPr>
-            <a:r>
-              <a:rPr lang="en-US" altLang="en-US" sz="2400" dirty="0">
-                <a:latin typeface="Arial" panose="020B0604020202020204" pitchFamily="34" charset="0"/>
-              </a:rPr>
-              <a:t>The second warning is about the output tau, which we did use.</a:t>
-            </a:r>
-          </a:p>
-        </p:txBody>
-      </p:sp>
-    </p:spTree>
-    <p:extLst>
-      <p:ext uri="{BB962C8B-B14F-4D97-AF65-F5344CB8AC3E}">
-        <p14:creationId xmlns:p14="http://schemas.microsoft.com/office/powerpoint/2010/main" val="1937469716"/>
-      </p:ext>
-    </p:extLst>
-  </p:cSld>
-  <p:clrMapOvr>
-    <a:masterClrMapping/>
-  </p:clrMapOvr>
-</p:sld>
-</file>
-
-<file path=ppt/slides/slide3.xml><?xml version="1.0" encoding="utf-8"?>
-<p:sld xmlns:a="http://schemas.openxmlformats.org/drawingml/2006/main" xmlns:r="http://schemas.openxmlformats.org/officeDocument/2006/relationships" xmlns:p="http://schemas.openxmlformats.org/presentationml/2006/main">
-  <p:cSld>
-    <p:spTree>
-      <p:nvGrpSpPr>
-        <p:cNvPr id="1" name=""/>
-        <p:cNvGrpSpPr/>
-        <p:nvPr/>
-      </p:nvGrpSpPr>
-      <p:grpSpPr>
-        <a:xfrm>
-          <a:off x="0" y="0"/>
-          <a:ext cx="0" cy="0"/>
-          <a:chOff x="0" y="0"/>
-          <a:chExt cx="0" cy="0"/>
-        </a:xfrm>
-      </p:grpSpPr>
-      <p:sp>
-        <p:nvSpPr>
-          <p:cNvPr id="2" name="Title 1">
-            <a:extLst>
-              <a:ext uri="{FF2B5EF4-FFF2-40B4-BE49-F238E27FC236}">
-                <a16:creationId xmlns:a16="http://schemas.microsoft.com/office/drawing/2014/main" id="{578380FA-537A-8AB3-577D-A17CDEB78D41}"/>
-              </a:ext>
-            </a:extLst>
-          </p:cNvPr>
-          <p:cNvSpPr>
-            <a:spLocks noGrp="1"/>
-          </p:cNvSpPr>
-          <p:nvPr>
-            <p:ph type="title"/>
-          </p:nvPr>
-        </p:nvSpPr>
-        <p:spPr>
-          <a:xfrm>
-            <a:off x="0" y="-260517"/>
-            <a:ext cx="10515600" cy="1325563"/>
-          </a:xfrm>
-        </p:spPr>
-        <p:txBody>
-          <a:bodyPr/>
-          <a:lstStyle/>
-          <a:p>
-            <a:r>
-              <a:rPr lang="en-US" dirty="0"/>
-              <a:t>What’s the different of am fitting file</a:t>
-            </a:r>
-          </a:p>
-        </p:txBody>
-      </p:sp>
-      <p:pic>
-        <p:nvPicPr>
-          <p:cNvPr id="7" name="Picture 6" descr="A screenshot of a computer&#10;&#10;AI-generated content may be incorrect.">
-            <a:extLst>
-              <a:ext uri="{FF2B5EF4-FFF2-40B4-BE49-F238E27FC236}">
-                <a16:creationId xmlns:a16="http://schemas.microsoft.com/office/drawing/2014/main" id="{1B846278-C645-4232-AD32-6E724E95E657}"/>
-              </a:ext>
-            </a:extLst>
-          </p:cNvPr>
-          <p:cNvPicPr>
-            <a:picLocks noChangeAspect="1"/>
-          </p:cNvPicPr>
-          <p:nvPr/>
-        </p:nvPicPr>
-        <p:blipFill>
-          <a:blip r:embed="rId2">
-            <a:extLst>
-              <a:ext uri="{28A0092B-C50C-407E-A947-70E740481C1C}">
-                <a14:useLocalDpi xmlns:a14="http://schemas.microsoft.com/office/drawing/2010/main" val="0"/>
-              </a:ext>
-            </a:extLst>
-          </a:blip>
-          <a:srcRect l="498" t="35001" r="55252" b="7608"/>
-          <a:stretch>
-            <a:fillRect/>
-          </a:stretch>
-        </p:blipFill>
-        <p:spPr>
-          <a:xfrm>
-            <a:off x="202130" y="1491916"/>
-            <a:ext cx="5893869" cy="4193781"/>
-          </a:xfrm>
-          <a:prstGeom prst="rect">
-            <a:avLst/>
-          </a:prstGeom>
-        </p:spPr>
-      </p:pic>
-      <p:pic>
-        <p:nvPicPr>
-          <p:cNvPr id="8" name="Picture 7" descr="A screenshot of a computer&#10;&#10;AI-generated content may be incorrect.">
-            <a:extLst>
-              <a:ext uri="{FF2B5EF4-FFF2-40B4-BE49-F238E27FC236}">
-                <a16:creationId xmlns:a16="http://schemas.microsoft.com/office/drawing/2014/main" id="{AB0F3FFD-9827-E3A1-898C-6E19E06ED130}"/>
-              </a:ext>
-            </a:extLst>
-          </p:cNvPr>
-          <p:cNvPicPr>
-            <a:picLocks noChangeAspect="1"/>
-          </p:cNvPicPr>
-          <p:nvPr/>
-        </p:nvPicPr>
-        <p:blipFill>
-          <a:blip r:embed="rId3"/>
-          <a:srcRect t="21835" r="43072" b="7142"/>
-          <a:stretch>
-            <a:fillRect/>
-          </a:stretch>
-        </p:blipFill>
-        <p:spPr>
-          <a:xfrm>
-            <a:off x="6319499" y="1491916"/>
-            <a:ext cx="5679996" cy="4193781"/>
-          </a:xfrm>
-          <a:prstGeom prst="rect">
-            <a:avLst/>
-          </a:prstGeom>
-        </p:spPr>
-      </p:pic>
-    </p:spTree>
-    <p:extLst>
-      <p:ext uri="{BB962C8B-B14F-4D97-AF65-F5344CB8AC3E}">
-        <p14:creationId xmlns:p14="http://schemas.microsoft.com/office/powerpoint/2010/main" val="2549021408"/>
-      </p:ext>
-    </p:extLst>
-  </p:cSld>
-  <p:clrMapOvr>
-    <a:masterClrMapping/>
-  </p:clrMapOvr>
-</p:sld>
-</file>
-
-<file path=ppt/slides/slide4.xml><?xml version="1.0" encoding="utf-8"?>
-<p:sld xmlns:a="http://schemas.openxmlformats.org/drawingml/2006/main" xmlns:r="http://schemas.openxmlformats.org/officeDocument/2006/relationships" xmlns:p="http://schemas.openxmlformats.org/presentationml/2006/main">
-  <p:cSld>
-    <p:spTree>
-      <p:nvGrpSpPr>
-        <p:cNvPr id="1" name=""/>
-        <p:cNvGrpSpPr/>
-        <p:nvPr/>
-      </p:nvGrpSpPr>
-      <p:grpSpPr>
-        <a:xfrm>
-          <a:off x="0" y="0"/>
-          <a:ext cx="0" cy="0"/>
-          <a:chOff x="0" y="0"/>
-          <a:chExt cx="0" cy="0"/>
-        </a:xfrm>
-      </p:grpSpPr>
-      <p:pic>
-        <p:nvPicPr>
-          <p:cNvPr id="10" name="Picture 9">
-            <a:extLst>
-              <a:ext uri="{FF2B5EF4-FFF2-40B4-BE49-F238E27FC236}">
-                <a16:creationId xmlns:a16="http://schemas.microsoft.com/office/drawing/2014/main" id="{126B6DC2-F677-3A2D-9C9E-3E54AAAF95DB}"/>
-              </a:ext>
-            </a:extLst>
-          </p:cNvPr>
-          <p:cNvPicPr>
-            <a:picLocks noChangeAspect="1"/>
-          </p:cNvPicPr>
-          <p:nvPr/>
-        </p:nvPicPr>
-        <p:blipFill>
-          <a:blip r:embed="rId2"/>
-          <a:stretch>
-            <a:fillRect/>
-          </a:stretch>
-        </p:blipFill>
-        <p:spPr>
-          <a:xfrm>
-            <a:off x="1355408" y="968435"/>
-            <a:ext cx="7047446" cy="2390727"/>
-          </a:xfrm>
-          <a:prstGeom prst="rect">
-            <a:avLst/>
-          </a:prstGeom>
-        </p:spPr>
-      </p:pic>
-      <p:sp>
-        <p:nvSpPr>
-          <p:cNvPr id="4" name="TextBox 3">
-            <a:extLst>
-              <a:ext uri="{FF2B5EF4-FFF2-40B4-BE49-F238E27FC236}">
-                <a16:creationId xmlns:a16="http://schemas.microsoft.com/office/drawing/2014/main" id="{E4902A71-3916-C538-C1D4-DF6B9B7DDCB5}"/>
-              </a:ext>
-            </a:extLst>
-          </p:cNvPr>
-          <p:cNvSpPr txBox="1"/>
-          <p:nvPr/>
-        </p:nvSpPr>
-        <p:spPr>
-          <a:xfrm>
-            <a:off x="1463040" y="3801979"/>
-            <a:ext cx="9818778" cy="369332"/>
-          </a:xfrm>
-          <a:prstGeom prst="rect">
-            <a:avLst/>
-          </a:prstGeom>
-          <a:noFill/>
-        </p:spPr>
-        <p:txBody>
-          <a:bodyPr wrap="none" rtlCol="0">
-            <a:spAutoFit/>
-          </a:bodyPr>
-          <a:lstStyle/>
-          <a:p>
-            <a:r>
-              <a:rPr lang="en-US" dirty="0"/>
-              <a:t>add output to 0 to turn off writing those files, but we need the </a:t>
-            </a:r>
-            <a:r>
-              <a:rPr lang="en-US" dirty="0" err="1"/>
-              <a:t>amc</a:t>
-            </a:r>
-            <a:r>
-              <a:rPr lang="en-US" dirty="0"/>
-              <a:t> file to read the </a:t>
-            </a:r>
-            <a:r>
-              <a:rPr lang="en-US" dirty="0" err="1"/>
-              <a:t>pwv</a:t>
-            </a:r>
-            <a:r>
-              <a:rPr lang="en-US" dirty="0"/>
-              <a:t> fitting result</a:t>
-            </a:r>
-          </a:p>
-        </p:txBody>
-      </p:sp>
-    </p:spTree>
-    <p:extLst>
-      <p:ext uri="{BB962C8B-B14F-4D97-AF65-F5344CB8AC3E}">
-        <p14:creationId xmlns:p14="http://schemas.microsoft.com/office/powerpoint/2010/main" val="888951284"/>
-      </p:ext>
-    </p:extLst>
-  </p:cSld>
-  <p:clrMapOvr>
-    <a:masterClrMapping/>
-  </p:clrMapOvr>
-</p:sld>
-</file>
-
-<file path=ppt/slides/slide5.xml><?xml version="1.0" encoding="utf-8"?>
-<p:sld xmlns:a="http://schemas.openxmlformats.org/drawingml/2006/main" xmlns:r="http://schemas.openxmlformats.org/officeDocument/2006/relationships" xmlns:p="http://schemas.openxmlformats.org/presentationml/2006/main">
-  <p:cSld>
-    <p:spTree>
-      <p:nvGrpSpPr>
-        <p:cNvPr id="1" name="">
-          <a:extLst>
-            <a:ext uri="{FF2B5EF4-FFF2-40B4-BE49-F238E27FC236}">
-              <a16:creationId xmlns:a16="http://schemas.microsoft.com/office/drawing/2014/main" id="{4ECA2523-5D32-9B6E-0CE8-2B0CF77BE4DD}"/>
-            </a:ext>
-          </a:extLst>
-        </p:cNvPr>
-        <p:cNvGrpSpPr/>
-        <p:nvPr/>
-      </p:nvGrpSpPr>
-      <p:grpSpPr>
-        <a:xfrm>
-          <a:off x="0" y="0"/>
-          <a:ext cx="0" cy="0"/>
-          <a:chOff x="0" y="0"/>
-          <a:chExt cx="0" cy="0"/>
-        </a:xfrm>
-      </p:grpSpPr>
-      <p:sp>
-        <p:nvSpPr>
-          <p:cNvPr id="7" name="TextBox 6">
-            <a:extLst>
-              <a:ext uri="{FF2B5EF4-FFF2-40B4-BE49-F238E27FC236}">
-                <a16:creationId xmlns:a16="http://schemas.microsoft.com/office/drawing/2014/main" id="{0C63595D-BB6F-02D8-8D0E-8ABAC6FBCE4A}"/>
-              </a:ext>
-            </a:extLst>
-          </p:cNvPr>
-          <p:cNvSpPr txBox="1"/>
-          <p:nvPr/>
-        </p:nvSpPr>
-        <p:spPr>
-          <a:xfrm>
-            <a:off x="173254" y="192505"/>
-            <a:ext cx="2293064" cy="705642"/>
-          </a:xfrm>
-          <a:prstGeom prst="rect">
-            <a:avLst/>
-          </a:prstGeom>
-        </p:spPr>
-        <p:txBody>
-          <a:bodyPr vert="horz" lIns="91440" tIns="45720" rIns="91440" bIns="45720" rtlCol="0" anchor="ctr">
-            <a:normAutofit/>
-          </a:bodyPr>
-          <a:lstStyle>
-            <a:lvl1pPr>
-              <a:lnSpc>
-                <a:spcPct val="90000"/>
-              </a:lnSpc>
-              <a:spcBef>
-                <a:spcPct val="0"/>
-              </a:spcBef>
-              <a:buNone/>
-              <a:defRPr sz="4400">
-                <a:latin typeface="+mj-lt"/>
-                <a:ea typeface="+mj-ea"/>
-                <a:cs typeface="+mj-cs"/>
-              </a:defRPr>
-            </a:lvl1pPr>
-          </a:lstStyle>
-          <a:p>
-            <a:r>
-              <a:rPr lang="en-US" dirty="0"/>
-              <a:t>am fitting</a:t>
-            </a:r>
-          </a:p>
-        </p:txBody>
-      </p:sp>
-      <p:pic>
-        <p:nvPicPr>
-          <p:cNvPr id="2" name="Picture 1" descr="A screenshot of a computer&#10;&#10;AI-generated content may be incorrect.">
-            <a:extLst>
-              <a:ext uri="{FF2B5EF4-FFF2-40B4-BE49-F238E27FC236}">
-                <a16:creationId xmlns:a16="http://schemas.microsoft.com/office/drawing/2014/main" id="{BB2C43E5-2C7D-7836-97A5-7A17BE99651C}"/>
-              </a:ext>
-            </a:extLst>
-          </p:cNvPr>
-          <p:cNvPicPr>
-            <a:picLocks noChangeAspect="1"/>
-          </p:cNvPicPr>
-          <p:nvPr/>
-        </p:nvPicPr>
-        <p:blipFill>
-          <a:blip r:embed="rId2"/>
-          <a:srcRect l="4390" r="13031" b="20419"/>
-          <a:stretch>
-            <a:fillRect/>
-          </a:stretch>
-        </p:blipFill>
-        <p:spPr>
-          <a:xfrm>
-            <a:off x="2630685" y="545327"/>
-            <a:ext cx="3528249" cy="1384058"/>
-          </a:xfrm>
-          <a:prstGeom prst="rect">
-            <a:avLst/>
-          </a:prstGeom>
-        </p:spPr>
-      </p:pic>
-      <p:pic>
-        <p:nvPicPr>
-          <p:cNvPr id="3" name="Picture 2" descr="A screenshot of a computer&#10;&#10;AI-generated content may be incorrect.">
-            <a:extLst>
-              <a:ext uri="{FF2B5EF4-FFF2-40B4-BE49-F238E27FC236}">
-                <a16:creationId xmlns:a16="http://schemas.microsoft.com/office/drawing/2014/main" id="{5E26C7D7-AAE3-254A-4799-3EE85BEEF40C}"/>
-              </a:ext>
-            </a:extLst>
-          </p:cNvPr>
-          <p:cNvPicPr>
-            <a:picLocks noChangeAspect="1"/>
-          </p:cNvPicPr>
-          <p:nvPr/>
-        </p:nvPicPr>
-        <p:blipFill>
-          <a:blip r:embed="rId3"/>
-          <a:stretch>
-            <a:fillRect/>
-          </a:stretch>
-        </p:blipFill>
-        <p:spPr>
-          <a:xfrm>
-            <a:off x="2630685" y="2007393"/>
-            <a:ext cx="7978321" cy="988405"/>
-          </a:xfrm>
-          <a:prstGeom prst="rect">
-            <a:avLst/>
-          </a:prstGeom>
-        </p:spPr>
-      </p:pic>
-      <p:grpSp>
-        <p:nvGrpSpPr>
-          <p:cNvPr id="16" name="Group 15">
-            <a:extLst>
-              <a:ext uri="{FF2B5EF4-FFF2-40B4-BE49-F238E27FC236}">
-                <a16:creationId xmlns:a16="http://schemas.microsoft.com/office/drawing/2014/main" id="{F5CB9E2B-7275-90F3-10B2-998DC0F88508}"/>
-              </a:ext>
-            </a:extLst>
-          </p:cNvPr>
-          <p:cNvGrpSpPr/>
-          <p:nvPr/>
-        </p:nvGrpSpPr>
-        <p:grpSpPr>
-          <a:xfrm>
-            <a:off x="2466318" y="3507596"/>
-            <a:ext cx="8501773" cy="543857"/>
-            <a:chOff x="2644763" y="3900988"/>
-            <a:chExt cx="8501773" cy="543857"/>
-          </a:xfrm>
-        </p:grpSpPr>
-        <p:pic>
-          <p:nvPicPr>
-            <p:cNvPr id="14" name="Picture 13">
-              <a:extLst>
-                <a:ext uri="{FF2B5EF4-FFF2-40B4-BE49-F238E27FC236}">
-                  <a16:creationId xmlns:a16="http://schemas.microsoft.com/office/drawing/2014/main" id="{9FF09BE9-9D1E-F5F3-A9B2-0B214D549DA7}"/>
-                </a:ext>
-              </a:extLst>
-            </p:cNvPr>
-            <p:cNvPicPr>
-              <a:picLocks noChangeAspect="1"/>
-            </p:cNvPicPr>
-            <p:nvPr/>
-          </p:nvPicPr>
-          <p:blipFill>
-            <a:blip r:embed="rId4"/>
-            <a:stretch>
-              <a:fillRect/>
-            </a:stretch>
-          </p:blipFill>
-          <p:spPr>
-            <a:xfrm>
-              <a:off x="2644763" y="3900988"/>
-              <a:ext cx="8501773" cy="543857"/>
-            </a:xfrm>
-            <a:prstGeom prst="rect">
-              <a:avLst/>
-            </a:prstGeom>
-          </p:spPr>
-        </p:pic>
-        <p:sp>
-          <p:nvSpPr>
-            <p:cNvPr id="15" name="Rectangle 14">
-              <a:extLst>
-                <a:ext uri="{FF2B5EF4-FFF2-40B4-BE49-F238E27FC236}">
-                  <a16:creationId xmlns:a16="http://schemas.microsoft.com/office/drawing/2014/main" id="{A8660B43-A5F2-C9A9-6795-6F08541F5FE8}"/>
-                </a:ext>
-              </a:extLst>
-            </p:cNvPr>
-            <p:cNvSpPr/>
-            <p:nvPr/>
-          </p:nvSpPr>
-          <p:spPr>
-            <a:xfrm>
-              <a:off x="9006840" y="4160520"/>
-              <a:ext cx="2139696" cy="284325"/>
-            </a:xfrm>
-            <a:prstGeom prst="rect">
-              <a:avLst/>
-            </a:prstGeom>
-            <a:solidFill>
-              <a:schemeClr val="bg1"/>
-            </a:solidFill>
-            <a:ln>
-              <a:solidFill>
-                <a:schemeClr val="bg1"/>
-              </a:solidFill>
-            </a:ln>
-          </p:spPr>
-          <p:style>
-            <a:lnRef idx="2">
-              <a:schemeClr val="accent1">
-                <a:shade val="15000"/>
-              </a:schemeClr>
-            </a:lnRef>
-            <a:fillRef idx="1">
-              <a:schemeClr val="accent1"/>
-            </a:fillRef>
-            <a:effectRef idx="0">
-              <a:schemeClr val="accent1"/>
-            </a:effectRef>
-            <a:fontRef idx="minor">
-              <a:schemeClr val="lt1"/>
-            </a:fontRef>
-          </p:style>
-          <p:txBody>
-            <a:bodyPr rtlCol="0" anchor="ctr"/>
-            <a:lstStyle/>
-            <a:p>
-              <a:pPr algn="ctr"/>
-              <a:endParaRPr lang="en-US"/>
-            </a:p>
-          </p:txBody>
-        </p:sp>
-      </p:grpSp>
-      <p:sp>
-        <p:nvSpPr>
-          <p:cNvPr id="17" name="TextBox 16">
-            <a:extLst>
-              <a:ext uri="{FF2B5EF4-FFF2-40B4-BE49-F238E27FC236}">
-                <a16:creationId xmlns:a16="http://schemas.microsoft.com/office/drawing/2014/main" id="{91725F19-EDB2-AF8B-7821-E9B61169D865}"/>
-              </a:ext>
-            </a:extLst>
-          </p:cNvPr>
-          <p:cNvSpPr txBox="1"/>
-          <p:nvPr/>
-        </p:nvSpPr>
-        <p:spPr>
-          <a:xfrm>
-            <a:off x="2561618" y="4051453"/>
-            <a:ext cx="8501773" cy="1754326"/>
-          </a:xfrm>
-          <a:prstGeom prst="rect">
-            <a:avLst/>
-          </a:prstGeom>
-          <a:noFill/>
-        </p:spPr>
-        <p:txBody>
-          <a:bodyPr wrap="square" rtlCol="0">
-            <a:spAutoFit/>
-          </a:bodyPr>
-          <a:lstStyle/>
-          <a:p>
-            <a:r>
-              <a:rPr lang="en-US" dirty="0"/>
-              <a:t>From </a:t>
-            </a:r>
-            <a:r>
-              <a:rPr lang="en-US" dirty="0" err="1"/>
-              <a:t>amc</a:t>
-            </a:r>
-            <a:r>
-              <a:rPr lang="en-US" dirty="0"/>
-              <a:t>, we expect the </a:t>
-            </a:r>
-            <a:r>
-              <a:rPr lang="en-US" dirty="0" err="1"/>
-              <a:t>dat</a:t>
-            </a:r>
-            <a:r>
-              <a:rPr lang="en-US" dirty="0"/>
-              <a:t> file as</a:t>
-            </a:r>
-          </a:p>
-          <a:p>
-            <a:r>
-              <a:rPr lang="en-US" dirty="0"/>
-              <a:t>	 frequence(</a:t>
-            </a:r>
-            <a:r>
-              <a:rPr lang="en-US" dirty="0" err="1"/>
-              <a:t>v_i</a:t>
-            </a:r>
-            <a:r>
-              <a:rPr lang="en-US" dirty="0"/>
-              <a:t>) 	</a:t>
-            </a:r>
-            <a:r>
-              <a:rPr lang="en-US" dirty="0" err="1"/>
-              <a:t>bandwith</a:t>
-            </a:r>
-            <a:r>
-              <a:rPr lang="en-US" dirty="0"/>
-              <a:t>(</a:t>
-            </a:r>
-            <a:r>
-              <a:rPr lang="en-US" dirty="0" err="1"/>
-              <a:t>b_i</a:t>
-            </a:r>
-            <a:r>
-              <a:rPr lang="en-US" dirty="0"/>
-              <a:t>)  	spectral data (</a:t>
-            </a:r>
-            <a:r>
-              <a:rPr lang="en-US" dirty="0" err="1"/>
-              <a:t>s_i</a:t>
-            </a:r>
-            <a:r>
-              <a:rPr lang="en-US" dirty="0"/>
-              <a:t>)</a:t>
-            </a:r>
-          </a:p>
-          <a:p>
-            <a:r>
-              <a:rPr lang="en-US" dirty="0"/>
-              <a:t>So, the </a:t>
-            </a:r>
-            <a:r>
-              <a:rPr lang="en-US" dirty="0" err="1"/>
-              <a:t>dat</a:t>
-            </a:r>
-            <a:r>
-              <a:rPr lang="en-US" dirty="0"/>
-              <a:t> is means:</a:t>
-            </a:r>
-          </a:p>
-          <a:p>
-            <a:r>
-              <a:rPr lang="en-US" dirty="0"/>
-              <a:t>	observing 184.55(183.3 + 1.25)  GHz, the bandwidth is 1.50 GHz, spectral data is the observing temperature </a:t>
-            </a:r>
-          </a:p>
-          <a:p>
-            <a:endParaRPr lang="en-US" dirty="0"/>
-          </a:p>
-        </p:txBody>
-      </p:sp>
-      <p:pic>
-        <p:nvPicPr>
-          <p:cNvPr id="22" name="Picture 21">
-            <a:extLst>
-              <a:ext uri="{FF2B5EF4-FFF2-40B4-BE49-F238E27FC236}">
-                <a16:creationId xmlns:a16="http://schemas.microsoft.com/office/drawing/2014/main" id="{28A343FB-936E-2D97-F687-96C21E34F13B}"/>
-              </a:ext>
-            </a:extLst>
-          </p:cNvPr>
-          <p:cNvPicPr>
-            <a:picLocks noChangeAspect="1"/>
-          </p:cNvPicPr>
-          <p:nvPr/>
-        </p:nvPicPr>
-        <p:blipFill>
-          <a:blip r:embed="rId5"/>
-          <a:stretch>
-            <a:fillRect/>
-          </a:stretch>
-        </p:blipFill>
-        <p:spPr>
-          <a:xfrm>
-            <a:off x="2630685" y="3032012"/>
-            <a:ext cx="5109124" cy="475584"/>
-          </a:xfrm>
-          <a:prstGeom prst="rect">
-            <a:avLst/>
-          </a:prstGeom>
-        </p:spPr>
-      </p:pic>
-    </p:spTree>
-    <p:extLst>
-      <p:ext uri="{BB962C8B-B14F-4D97-AF65-F5344CB8AC3E}">
-        <p14:creationId xmlns:p14="http://schemas.microsoft.com/office/powerpoint/2010/main" val="362772443"/>
-      </p:ext>
-    </p:extLst>
-  </p:cSld>
-  <p:clrMapOvr>
-    <a:masterClrMapping/>
-  </p:clrMapOvr>
-</p:sld>
-</file>
-
-<file path=ppt/slides/slide6.xml><?xml version="1.0" encoding="utf-8"?>
-<p:sld xmlns:a="http://schemas.openxmlformats.org/drawingml/2006/main" xmlns:r="http://schemas.openxmlformats.org/officeDocument/2006/relationships" xmlns:p="http://schemas.openxmlformats.org/presentationml/2006/main">
-  <p:cSld>
-    <p:spTree>
-      <p:nvGrpSpPr>
-        <p:cNvPr id="1" name=""/>
-        <p:cNvGrpSpPr/>
-        <p:nvPr/>
-      </p:nvGrpSpPr>
-      <p:grpSpPr>
-        <a:xfrm>
-          <a:off x="0" y="0"/>
-          <a:ext cx="0" cy="0"/>
-          <a:chOff x="0" y="0"/>
-          <a:chExt cx="0" cy="0"/>
-        </a:xfrm>
-      </p:grpSpPr>
-      <p:sp>
-        <p:nvSpPr>
-          <p:cNvPr id="2" name="Title 1">
-            <a:extLst>
-              <a:ext uri="{FF2B5EF4-FFF2-40B4-BE49-F238E27FC236}">
-                <a16:creationId xmlns:a16="http://schemas.microsoft.com/office/drawing/2014/main" id="{DB05171B-69DA-55D5-4F3D-7E192123E4FF}"/>
-              </a:ext>
-            </a:extLst>
-          </p:cNvPr>
-          <p:cNvSpPr>
-            <a:spLocks noGrp="1"/>
-          </p:cNvSpPr>
-          <p:nvPr>
-            <p:ph type="title"/>
-          </p:nvPr>
-        </p:nvSpPr>
-        <p:spPr/>
-        <p:txBody>
-          <a:bodyPr/>
-          <a:lstStyle/>
-          <a:p>
-            <a:r>
-              <a:rPr lang="en-US" dirty="0"/>
-              <a:t>Output </a:t>
-            </a:r>
-            <a:r>
-              <a:rPr lang="en-US" dirty="0" err="1"/>
-              <a:t>amc</a:t>
-            </a:r>
-            <a:r>
-              <a:rPr lang="en-US" dirty="0"/>
-              <a:t> file</a:t>
-            </a:r>
-          </a:p>
-        </p:txBody>
-      </p:sp>
-      <p:sp>
-        <p:nvSpPr>
-          <p:cNvPr id="3" name="Content Placeholder 2">
-            <a:extLst>
-              <a:ext uri="{FF2B5EF4-FFF2-40B4-BE49-F238E27FC236}">
-                <a16:creationId xmlns:a16="http://schemas.microsoft.com/office/drawing/2014/main" id="{8D9FF148-F399-7F4B-E940-5C1FDAE2162C}"/>
-              </a:ext>
-            </a:extLst>
-          </p:cNvPr>
-          <p:cNvSpPr>
-            <a:spLocks noGrp="1"/>
-          </p:cNvSpPr>
-          <p:nvPr>
-            <p:ph idx="1"/>
-          </p:nvPr>
-        </p:nvSpPr>
-        <p:spPr/>
-        <p:txBody>
-          <a:bodyPr/>
-          <a:lstStyle/>
-          <a:p>
-            <a:endParaRPr lang="en-US"/>
-          </a:p>
-        </p:txBody>
-      </p:sp>
-      <p:pic>
-        <p:nvPicPr>
-          <p:cNvPr id="5" name="Picture 4">
-            <a:extLst>
-              <a:ext uri="{FF2B5EF4-FFF2-40B4-BE49-F238E27FC236}">
-                <a16:creationId xmlns:a16="http://schemas.microsoft.com/office/drawing/2014/main" id="{B0ACF5D0-3823-187A-ACFF-D1D7E3EEC837}"/>
-              </a:ext>
-            </a:extLst>
-          </p:cNvPr>
-          <p:cNvPicPr>
-            <a:picLocks noChangeAspect="1"/>
-          </p:cNvPicPr>
-          <p:nvPr/>
-        </p:nvPicPr>
-        <p:blipFill>
-          <a:blip r:embed="rId2"/>
-          <a:stretch>
-            <a:fillRect/>
-          </a:stretch>
-        </p:blipFill>
-        <p:spPr>
-          <a:xfrm>
-            <a:off x="5168765" y="78882"/>
-            <a:ext cx="6513225" cy="6660995"/>
-          </a:xfrm>
-          <a:prstGeom prst="rect">
-            <a:avLst/>
-          </a:prstGeom>
-        </p:spPr>
-      </p:pic>
-      <mc:AlternateContent xmlns:mc="http://schemas.openxmlformats.org/markup-compatibility/2006" xmlns:p14="http://schemas.microsoft.com/office/powerpoint/2010/main">
-        <mc:Choice Requires="p14">
-          <p:contentPart p14:bwMode="auto" r:id="rId3">
-            <p14:nvContentPartPr>
-              <p14:cNvPr id="7" name="Ink 6">
-                <a:extLst>
-                  <a:ext uri="{FF2B5EF4-FFF2-40B4-BE49-F238E27FC236}">
-                    <a16:creationId xmlns:a16="http://schemas.microsoft.com/office/drawing/2014/main" id="{372399EB-2705-52BB-4D23-D56054595D9A}"/>
-                  </a:ext>
-                </a:extLst>
-              </p14:cNvPr>
-              <p14:cNvContentPartPr/>
-              <p14:nvPr/>
-            </p14:nvContentPartPr>
-            <p14:xfrm>
-              <a:off x="5948242" y="2492716"/>
-              <a:ext cx="2585520" cy="48960"/>
-            </p14:xfrm>
-          </p:contentPart>
-        </mc:Choice>
-        <mc:Fallback xmlns="">
-          <p:pic>
-            <p:nvPicPr>
-              <p:cNvPr id="7" name="Ink 6">
-                <a:extLst>
-                  <a:ext uri="{FF2B5EF4-FFF2-40B4-BE49-F238E27FC236}">
-                    <a16:creationId xmlns:a16="http://schemas.microsoft.com/office/drawing/2014/main" id="{372399EB-2705-52BB-4D23-D56054595D9A}"/>
-                  </a:ext>
-                </a:extLst>
-              </p:cNvPr>
-              <p:cNvPicPr/>
-              <p:nvPr/>
-            </p:nvPicPr>
-            <p:blipFill>
-              <a:blip r:embed="rId4"/>
-              <a:stretch>
-                <a:fillRect/>
-              </a:stretch>
-            </p:blipFill>
-            <p:spPr>
-              <a:xfrm>
-                <a:off x="5939602" y="2484076"/>
-                <a:ext cx="2603160" cy="66600"/>
-              </a:xfrm>
-              <a:prstGeom prst="rect">
-                <a:avLst/>
-              </a:prstGeom>
-            </p:spPr>
-          </p:pic>
-        </mc:Fallback>
-      </mc:AlternateContent>
-      <mc:AlternateContent xmlns:mc="http://schemas.openxmlformats.org/markup-compatibility/2006" xmlns:p14="http://schemas.microsoft.com/office/powerpoint/2010/main">
-        <mc:Choice Requires="p14">
-          <p:contentPart p14:bwMode="auto" r:id="rId5">
-            <p14:nvContentPartPr>
-              <p14:cNvPr id="8" name="Ink 7">
-                <a:extLst>
-                  <a:ext uri="{FF2B5EF4-FFF2-40B4-BE49-F238E27FC236}">
-                    <a16:creationId xmlns:a16="http://schemas.microsoft.com/office/drawing/2014/main" id="{3F16A474-8ADC-C31D-C06B-3A952F2793AC}"/>
-                  </a:ext>
-                </a:extLst>
-              </p14:cNvPr>
-              <p14:cNvContentPartPr/>
-              <p14:nvPr/>
-            </p14:nvContentPartPr>
-            <p14:xfrm>
-              <a:off x="-260678" y="2300116"/>
-              <a:ext cx="360" cy="360"/>
-            </p14:xfrm>
-          </p:contentPart>
-        </mc:Choice>
-        <mc:Fallback xmlns="">
-          <p:pic>
-            <p:nvPicPr>
-              <p:cNvPr id="8" name="Ink 7">
-                <a:extLst>
-                  <a:ext uri="{FF2B5EF4-FFF2-40B4-BE49-F238E27FC236}">
-                    <a16:creationId xmlns:a16="http://schemas.microsoft.com/office/drawing/2014/main" id="{3F16A474-8ADC-C31D-C06B-3A952F2793AC}"/>
-                  </a:ext>
-                </a:extLst>
-              </p:cNvPr>
-              <p:cNvPicPr/>
-              <p:nvPr/>
-            </p:nvPicPr>
-            <p:blipFill>
-              <a:blip r:embed="rId6"/>
-              <a:stretch>
-                <a:fillRect/>
-              </a:stretch>
-            </p:blipFill>
-            <p:spPr>
-              <a:xfrm>
-                <a:off x="-269318" y="2291476"/>
-                <a:ext cx="18000" cy="18000"/>
-              </a:xfrm>
-              <a:prstGeom prst="rect">
-                <a:avLst/>
-              </a:prstGeom>
-            </p:spPr>
-          </p:pic>
-        </mc:Fallback>
-      </mc:AlternateContent>
-    </p:spTree>
-    <p:extLst>
-      <p:ext uri="{BB962C8B-B14F-4D97-AF65-F5344CB8AC3E}">
-        <p14:creationId xmlns:p14="http://schemas.microsoft.com/office/powerpoint/2010/main" val="1466978456"/>
-      </p:ext>
-    </p:extLst>
-  </p:cSld>
-  <p:clrMapOvr>
-    <a:masterClrMapping/>
-  </p:clrMapOvr>
-</p:sld>
-</file>
-
-<file path=ppt/slides/slide7.xml><?xml version="1.0" encoding="utf-8"?>
 <p:sld xmlns:a="http://schemas.openxmlformats.org/drawingml/2006/main" xmlns:r="http://schemas.openxmlformats.org/officeDocument/2006/relationships" xmlns:p="http://schemas.openxmlformats.org/presentationml/2006/main">
   <p:cSld>
     <p:spTree>
@@ -5503,7 +3948,7 @@
 </p:sld>
 </file>
 
-<file path=ppt/slides/slide8.xml><?xml version="1.0" encoding="utf-8"?>
+<file path=ppt/slides/slide11.xml><?xml version="1.0" encoding="utf-8"?>
 <p:sld xmlns:a="http://schemas.openxmlformats.org/drawingml/2006/main" xmlns:r="http://schemas.openxmlformats.org/officeDocument/2006/relationships" xmlns:p="http://schemas.openxmlformats.org/presentationml/2006/main">
   <p:cSld>
     <p:spTree>
@@ -5551,8 +3996,8 @@
           </a:prstGeom>
         </p:spPr>
       </p:pic>
-      <mc:AlternateContent xmlns:mc="http://schemas.openxmlformats.org/markup-compatibility/2006">
-        <mc:Choice xmlns:p14="http://schemas.microsoft.com/office/powerpoint/2010/main" Requires="p14">
+      <mc:AlternateContent xmlns:mc="http://schemas.openxmlformats.org/markup-compatibility/2006" xmlns:p14="http://schemas.microsoft.com/office/powerpoint/2010/main">
+        <mc:Choice Requires="p14">
           <p:contentPart p14:bwMode="auto" r:id="rId3">
             <p14:nvContentPartPr>
               <p14:cNvPr id="17" name="Ink 16">
@@ -5571,7 +4016,7 @@
             </p14:xfrm>
           </p:contentPart>
         </mc:Choice>
-        <mc:Fallback>
+        <mc:Fallback xmlns="">
           <p:pic>
             <p:nvPicPr>
               <p:cNvPr id="17" name="Ink 16">
@@ -5602,8 +4047,8 @@
           </p:pic>
         </mc:Fallback>
       </mc:AlternateContent>
-      <mc:AlternateContent xmlns:mc="http://schemas.openxmlformats.org/markup-compatibility/2006">
-        <mc:Choice xmlns:p14="http://schemas.microsoft.com/office/powerpoint/2010/main" Requires="p14">
+      <mc:AlternateContent xmlns:mc="http://schemas.openxmlformats.org/markup-compatibility/2006" xmlns:p14="http://schemas.microsoft.com/office/powerpoint/2010/main">
+        <mc:Choice Requires="p14">
           <p:contentPart p14:bwMode="auto" r:id="rId5">
             <p14:nvContentPartPr>
               <p14:cNvPr id="19" name="Ink 18">
@@ -5622,7 +4067,7 @@
             </p14:xfrm>
           </p:contentPart>
         </mc:Choice>
-        <mc:Fallback>
+        <mc:Fallback xmlns="">
           <p:pic>
             <p:nvPicPr>
               <p:cNvPr id="19" name="Ink 18">
@@ -5653,8 +4098,8 @@
           </p:pic>
         </mc:Fallback>
       </mc:AlternateContent>
-      <mc:AlternateContent xmlns:mc="http://schemas.openxmlformats.org/markup-compatibility/2006">
-        <mc:Choice xmlns:p14="http://schemas.microsoft.com/office/powerpoint/2010/main" Requires="p14">
+      <mc:AlternateContent xmlns:mc="http://schemas.openxmlformats.org/markup-compatibility/2006" xmlns:p14="http://schemas.microsoft.com/office/powerpoint/2010/main">
+        <mc:Choice Requires="p14">
           <p:contentPart p14:bwMode="auto" r:id="rId7">
             <p14:nvContentPartPr>
               <p14:cNvPr id="20" name="Ink 19">
@@ -5673,7 +4118,7 @@
             </p14:xfrm>
           </p:contentPart>
         </mc:Choice>
-        <mc:Fallback>
+        <mc:Fallback xmlns="">
           <p:pic>
             <p:nvPicPr>
               <p:cNvPr id="20" name="Ink 19">
@@ -5765,6 +4210,41 @@
           </a:prstGeom>
         </p:spPr>
       </p:pic>
+      <p:sp>
+        <p:nvSpPr>
+          <p:cNvPr id="2" name="TextBox 1">
+            <a:extLst>
+              <a:ext uri="{FF2B5EF4-FFF2-40B4-BE49-F238E27FC236}">
+                <a16:creationId xmlns:a16="http://schemas.microsoft.com/office/drawing/2014/main" id="{58D68763-76A2-D908-E331-6CC1834ED2FF}"/>
+              </a:ext>
+            </a:extLst>
+          </p:cNvPr>
+          <p:cNvSpPr txBox="1"/>
+          <p:nvPr/>
+        </p:nvSpPr>
+        <p:spPr>
+          <a:xfrm>
+            <a:off x="-2467070" y="1124644"/>
+            <a:ext cx="4440650" cy="584775"/>
+          </a:xfrm>
+          <a:prstGeom prst="rect">
+            <a:avLst/>
+          </a:prstGeom>
+          <a:noFill/>
+        </p:spPr>
+        <p:txBody>
+          <a:bodyPr wrap="square" rtlCol="0">
+            <a:spAutoFit/>
+          </a:bodyPr>
+          <a:lstStyle/>
+          <a:p>
+            <a:r>
+              <a:rPr lang="en-US" sz="3200" dirty="0"/>
+              <a:t>use real data</a:t>
+            </a:r>
+          </a:p>
+        </p:txBody>
+      </p:sp>
     </p:spTree>
     <p:extLst>
       <p:ext uri="{BB962C8B-B14F-4D97-AF65-F5344CB8AC3E}">
@@ -5778,7 +4258,7 @@
 </p:sld>
 </file>
 
-<file path=ppt/slides/slide9.xml><?xml version="1.0" encoding="utf-8"?>
+<file path=ppt/slides/slide12.xml><?xml version="1.0" encoding="utf-8"?>
 <p:sld xmlns:a="http://schemas.openxmlformats.org/drawingml/2006/main" xmlns:r="http://schemas.openxmlformats.org/officeDocument/2006/relationships" xmlns:p="http://schemas.openxmlformats.org/presentationml/2006/main">
   <p:cSld>
     <p:bg>
@@ -5992,6 +4472,2175 @@
     <p:extLst>
       <p:ext uri="{BB962C8B-B14F-4D97-AF65-F5344CB8AC3E}">
         <p14:creationId xmlns:p14="http://schemas.microsoft.com/office/powerpoint/2010/main" val="1901018244"/>
+      </p:ext>
+    </p:extLst>
+  </p:cSld>
+  <p:clrMapOvr>
+    <a:masterClrMapping/>
+  </p:clrMapOvr>
+</p:sld>
+</file>
+
+<file path=ppt/slides/slide13.xml><?xml version="1.0" encoding="utf-8"?>
+<p:sld xmlns:a="http://schemas.openxmlformats.org/drawingml/2006/main" xmlns:r="http://schemas.openxmlformats.org/officeDocument/2006/relationships" xmlns:p="http://schemas.openxmlformats.org/presentationml/2006/main">
+  <p:cSld>
+    <p:spTree>
+      <p:nvGrpSpPr>
+        <p:cNvPr id="1" name=""/>
+        <p:cNvGrpSpPr/>
+        <p:nvPr/>
+      </p:nvGrpSpPr>
+      <p:grpSpPr>
+        <a:xfrm>
+          <a:off x="0" y="0"/>
+          <a:ext cx="0" cy="0"/>
+          <a:chOff x="0" y="0"/>
+          <a:chExt cx="0" cy="0"/>
+        </a:xfrm>
+      </p:grpSpPr>
+      <p:sp>
+        <p:nvSpPr>
+          <p:cNvPr id="2" name="Title 1">
+            <a:extLst>
+              <a:ext uri="{FF2B5EF4-FFF2-40B4-BE49-F238E27FC236}">
+                <a16:creationId xmlns:a16="http://schemas.microsoft.com/office/drawing/2014/main" id="{F68BAF7A-6AB3-A46A-5A82-FE72F666373D}"/>
+              </a:ext>
+            </a:extLst>
+          </p:cNvPr>
+          <p:cNvSpPr>
+            <a:spLocks noGrp="1"/>
+          </p:cNvSpPr>
+          <p:nvPr>
+            <p:ph type="title"/>
+          </p:nvPr>
+        </p:nvSpPr>
+        <p:spPr/>
+        <p:txBody>
+          <a:bodyPr/>
+          <a:lstStyle/>
+          <a:p>
+            <a:endParaRPr lang="en-US"/>
+          </a:p>
+        </p:txBody>
+      </p:sp>
+      <p:sp>
+        <p:nvSpPr>
+          <p:cNvPr id="3" name="Content Placeholder 2">
+            <a:extLst>
+              <a:ext uri="{FF2B5EF4-FFF2-40B4-BE49-F238E27FC236}">
+                <a16:creationId xmlns:a16="http://schemas.microsoft.com/office/drawing/2014/main" id="{EE34964C-1CE2-D710-CD00-BDB8FCFC122D}"/>
+              </a:ext>
+            </a:extLst>
+          </p:cNvPr>
+          <p:cNvSpPr>
+            <a:spLocks noGrp="1"/>
+          </p:cNvSpPr>
+          <p:nvPr>
+            <p:ph idx="1"/>
+          </p:nvPr>
+        </p:nvSpPr>
+        <p:spPr/>
+        <p:txBody>
+          <a:bodyPr/>
+          <a:lstStyle/>
+          <a:p>
+            <a:endParaRPr lang="en-US"/>
+          </a:p>
+        </p:txBody>
+      </p:sp>
+      <p:pic>
+        <p:nvPicPr>
+          <p:cNvPr id="7" name="Picture 6">
+            <a:extLst>
+              <a:ext uri="{FF2B5EF4-FFF2-40B4-BE49-F238E27FC236}">
+                <a16:creationId xmlns:a16="http://schemas.microsoft.com/office/drawing/2014/main" id="{33F8D6B7-1BC3-AC3E-CF78-1067EAB31B38}"/>
+              </a:ext>
+            </a:extLst>
+          </p:cNvPr>
+          <p:cNvPicPr>
+            <a:picLocks noChangeAspect="1"/>
+          </p:cNvPicPr>
+          <p:nvPr/>
+        </p:nvPicPr>
+        <p:blipFill>
+          <a:blip r:embed="rId2"/>
+          <a:stretch>
+            <a:fillRect/>
+          </a:stretch>
+        </p:blipFill>
+        <p:spPr>
+          <a:xfrm>
+            <a:off x="82296" y="520678"/>
+            <a:ext cx="12027408" cy="5816644"/>
+          </a:xfrm>
+          <a:prstGeom prst="rect">
+            <a:avLst/>
+          </a:prstGeom>
+        </p:spPr>
+      </p:pic>
+    </p:spTree>
+    <p:extLst>
+      <p:ext uri="{BB962C8B-B14F-4D97-AF65-F5344CB8AC3E}">
+        <p14:creationId xmlns:p14="http://schemas.microsoft.com/office/powerpoint/2010/main" val="386364837"/>
+      </p:ext>
+    </p:extLst>
+  </p:cSld>
+  <p:clrMapOvr>
+    <a:masterClrMapping/>
+  </p:clrMapOvr>
+</p:sld>
+</file>
+
+<file path=ppt/slides/slide14.xml><?xml version="1.0" encoding="utf-8"?>
+<p:sld xmlns:a="http://schemas.openxmlformats.org/drawingml/2006/main" xmlns:r="http://schemas.openxmlformats.org/officeDocument/2006/relationships" xmlns:p="http://schemas.openxmlformats.org/presentationml/2006/main">
+  <p:cSld>
+    <p:spTree>
+      <p:nvGrpSpPr>
+        <p:cNvPr id="1" name=""/>
+        <p:cNvGrpSpPr/>
+        <p:nvPr/>
+      </p:nvGrpSpPr>
+      <p:grpSpPr>
+        <a:xfrm>
+          <a:off x="0" y="0"/>
+          <a:ext cx="0" cy="0"/>
+          <a:chOff x="0" y="0"/>
+          <a:chExt cx="0" cy="0"/>
+        </a:xfrm>
+      </p:grpSpPr>
+      <p:sp>
+        <p:nvSpPr>
+          <p:cNvPr id="2" name="Title 1">
+            <a:extLst>
+              <a:ext uri="{FF2B5EF4-FFF2-40B4-BE49-F238E27FC236}">
+                <a16:creationId xmlns:a16="http://schemas.microsoft.com/office/drawing/2014/main" id="{FAFF885B-62E6-9FC8-ECB2-587DDA180980}"/>
+              </a:ext>
+            </a:extLst>
+          </p:cNvPr>
+          <p:cNvSpPr>
+            <a:spLocks noGrp="1"/>
+          </p:cNvSpPr>
+          <p:nvPr>
+            <p:ph type="title"/>
+          </p:nvPr>
+        </p:nvSpPr>
+        <p:spPr/>
+        <p:txBody>
+          <a:bodyPr/>
+          <a:lstStyle/>
+          <a:p>
+            <a:endParaRPr lang="en-US" dirty="0"/>
+          </a:p>
+        </p:txBody>
+      </p:sp>
+      <p:sp>
+        <p:nvSpPr>
+          <p:cNvPr id="3" name="Content Placeholder 2">
+            <a:extLst>
+              <a:ext uri="{FF2B5EF4-FFF2-40B4-BE49-F238E27FC236}">
+                <a16:creationId xmlns:a16="http://schemas.microsoft.com/office/drawing/2014/main" id="{C5081F76-B985-E2F1-ABD4-F60DA73D2764}"/>
+              </a:ext>
+            </a:extLst>
+          </p:cNvPr>
+          <p:cNvSpPr>
+            <a:spLocks noGrp="1"/>
+          </p:cNvSpPr>
+          <p:nvPr>
+            <p:ph idx="1"/>
+          </p:nvPr>
+        </p:nvSpPr>
+        <p:spPr/>
+        <p:txBody>
+          <a:bodyPr/>
+          <a:lstStyle/>
+          <a:p>
+            <a:endParaRPr lang="en-US" dirty="0"/>
+          </a:p>
+        </p:txBody>
+      </p:sp>
+      <p:pic>
+        <p:nvPicPr>
+          <p:cNvPr id="16" name="Picture 15">
+            <a:extLst>
+              <a:ext uri="{FF2B5EF4-FFF2-40B4-BE49-F238E27FC236}">
+                <a16:creationId xmlns:a16="http://schemas.microsoft.com/office/drawing/2014/main" id="{A5E023AE-600F-0B58-AA52-36832140E8FD}"/>
+              </a:ext>
+            </a:extLst>
+          </p:cNvPr>
+          <p:cNvPicPr>
+            <a:picLocks noChangeAspect="1"/>
+          </p:cNvPicPr>
+          <p:nvPr/>
+        </p:nvPicPr>
+        <p:blipFill>
+          <a:blip r:embed="rId2"/>
+          <a:srcRect b="52710"/>
+          <a:stretch>
+            <a:fillRect/>
+          </a:stretch>
+        </p:blipFill>
+        <p:spPr>
+          <a:xfrm>
+            <a:off x="106681" y="184286"/>
+            <a:ext cx="11866238" cy="5992677"/>
+          </a:xfrm>
+          <a:prstGeom prst="rect">
+            <a:avLst/>
+          </a:prstGeom>
+        </p:spPr>
+      </p:pic>
+    </p:spTree>
+    <p:extLst>
+      <p:ext uri="{BB962C8B-B14F-4D97-AF65-F5344CB8AC3E}">
+        <p14:creationId xmlns:p14="http://schemas.microsoft.com/office/powerpoint/2010/main" val="1449506470"/>
+      </p:ext>
+    </p:extLst>
+  </p:cSld>
+  <p:clrMapOvr>
+    <a:masterClrMapping/>
+  </p:clrMapOvr>
+</p:sld>
+</file>
+
+<file path=ppt/slides/slide15.xml><?xml version="1.0" encoding="utf-8"?>
+<p:sld xmlns:a="http://schemas.openxmlformats.org/drawingml/2006/main" xmlns:r="http://schemas.openxmlformats.org/officeDocument/2006/relationships" xmlns:p="http://schemas.openxmlformats.org/presentationml/2006/main">
+  <p:cSld>
+    <p:spTree>
+      <p:nvGrpSpPr>
+        <p:cNvPr id="1" name="">
+          <a:extLst>
+            <a:ext uri="{FF2B5EF4-FFF2-40B4-BE49-F238E27FC236}">
+              <a16:creationId xmlns:a16="http://schemas.microsoft.com/office/drawing/2014/main" id="{19CE485C-B7B4-5679-B21F-F9B5D26C8E91}"/>
+            </a:ext>
+          </a:extLst>
+        </p:cNvPr>
+        <p:cNvGrpSpPr/>
+        <p:nvPr/>
+      </p:nvGrpSpPr>
+      <p:grpSpPr>
+        <a:xfrm>
+          <a:off x="0" y="0"/>
+          <a:ext cx="0" cy="0"/>
+          <a:chOff x="0" y="0"/>
+          <a:chExt cx="0" cy="0"/>
+        </a:xfrm>
+      </p:grpSpPr>
+      <p:sp>
+        <p:nvSpPr>
+          <p:cNvPr id="2" name="Title 1">
+            <a:extLst>
+              <a:ext uri="{FF2B5EF4-FFF2-40B4-BE49-F238E27FC236}">
+                <a16:creationId xmlns:a16="http://schemas.microsoft.com/office/drawing/2014/main" id="{63B642FD-CD1C-FE56-8F8C-85A63867FC3B}"/>
+              </a:ext>
+            </a:extLst>
+          </p:cNvPr>
+          <p:cNvSpPr>
+            <a:spLocks noGrp="1"/>
+          </p:cNvSpPr>
+          <p:nvPr>
+            <p:ph type="title"/>
+          </p:nvPr>
+        </p:nvSpPr>
+        <p:spPr/>
+        <p:txBody>
+          <a:bodyPr/>
+          <a:lstStyle/>
+          <a:p>
+            <a:endParaRPr lang="en-US" dirty="0"/>
+          </a:p>
+        </p:txBody>
+      </p:sp>
+      <p:sp>
+        <p:nvSpPr>
+          <p:cNvPr id="3" name="Content Placeholder 2">
+            <a:extLst>
+              <a:ext uri="{FF2B5EF4-FFF2-40B4-BE49-F238E27FC236}">
+                <a16:creationId xmlns:a16="http://schemas.microsoft.com/office/drawing/2014/main" id="{2253BADD-6FE2-1DC9-A919-48DB0245AB08}"/>
+              </a:ext>
+            </a:extLst>
+          </p:cNvPr>
+          <p:cNvSpPr>
+            <a:spLocks noGrp="1"/>
+          </p:cNvSpPr>
+          <p:nvPr>
+            <p:ph idx="1"/>
+          </p:nvPr>
+        </p:nvSpPr>
+        <p:spPr/>
+        <p:txBody>
+          <a:bodyPr/>
+          <a:lstStyle/>
+          <a:p>
+            <a:endParaRPr lang="en-US" dirty="0"/>
+          </a:p>
+        </p:txBody>
+      </p:sp>
+      <p:pic>
+        <p:nvPicPr>
+          <p:cNvPr id="4" name="Picture 3">
+            <a:extLst>
+              <a:ext uri="{FF2B5EF4-FFF2-40B4-BE49-F238E27FC236}">
+                <a16:creationId xmlns:a16="http://schemas.microsoft.com/office/drawing/2014/main" id="{30BAE685-1E38-8F35-3150-7608CDC57F8D}"/>
+              </a:ext>
+            </a:extLst>
+          </p:cNvPr>
+          <p:cNvPicPr>
+            <a:picLocks noChangeAspect="1"/>
+          </p:cNvPicPr>
+          <p:nvPr/>
+        </p:nvPicPr>
+        <p:blipFill>
+          <a:blip r:embed="rId2"/>
+          <a:srcRect t="46810"/>
+          <a:stretch>
+            <a:fillRect/>
+          </a:stretch>
+        </p:blipFill>
+        <p:spPr>
+          <a:xfrm>
+            <a:off x="91440" y="0"/>
+            <a:ext cx="11521439" cy="6544600"/>
+          </a:xfrm>
+          <a:prstGeom prst="rect">
+            <a:avLst/>
+          </a:prstGeom>
+        </p:spPr>
+      </p:pic>
+    </p:spTree>
+    <p:extLst>
+      <p:ext uri="{BB962C8B-B14F-4D97-AF65-F5344CB8AC3E}">
+        <p14:creationId xmlns:p14="http://schemas.microsoft.com/office/powerpoint/2010/main" val="1022494221"/>
+      </p:ext>
+    </p:extLst>
+  </p:cSld>
+  <p:clrMapOvr>
+    <a:masterClrMapping/>
+  </p:clrMapOvr>
+</p:sld>
+</file>
+
+<file path=ppt/slides/slide16.xml><?xml version="1.0" encoding="utf-8"?>
+<p:sld xmlns:a="http://schemas.openxmlformats.org/drawingml/2006/main" xmlns:r="http://schemas.openxmlformats.org/officeDocument/2006/relationships" xmlns:p="http://schemas.openxmlformats.org/presentationml/2006/main">
+  <p:cSld>
+    <p:spTree>
+      <p:nvGrpSpPr>
+        <p:cNvPr id="1" name=""/>
+        <p:cNvGrpSpPr/>
+        <p:nvPr/>
+      </p:nvGrpSpPr>
+      <p:grpSpPr>
+        <a:xfrm>
+          <a:off x="0" y="0"/>
+          <a:ext cx="0" cy="0"/>
+          <a:chOff x="0" y="0"/>
+          <a:chExt cx="0" cy="0"/>
+        </a:xfrm>
+      </p:grpSpPr>
+      <p:pic>
+        <p:nvPicPr>
+          <p:cNvPr id="11" name="Picture 10" descr="A graph with a blue line&#10;&#10;AI-generated content may be incorrect.">
+            <a:extLst>
+              <a:ext uri="{FF2B5EF4-FFF2-40B4-BE49-F238E27FC236}">
+                <a16:creationId xmlns:a16="http://schemas.microsoft.com/office/drawing/2014/main" id="{59757404-A945-B2FF-6C8D-EF85195E8545}"/>
+              </a:ext>
+            </a:extLst>
+          </p:cNvPr>
+          <p:cNvPicPr>
+            <a:picLocks noChangeAspect="1"/>
+          </p:cNvPicPr>
+          <p:nvPr/>
+        </p:nvPicPr>
+        <p:blipFill>
+          <a:blip r:embed="rId2">
+            <a:extLst>
+              <a:ext uri="{28A0092B-C50C-407E-A947-70E740481C1C}">
+                <a14:useLocalDpi xmlns:a14="http://schemas.microsoft.com/office/drawing/2010/main" val="0"/>
+              </a:ext>
+            </a:extLst>
+          </a:blip>
+          <a:srcRect l="8230" t="7084" b="6458"/>
+          <a:stretch>
+            <a:fillRect/>
+          </a:stretch>
+        </p:blipFill>
+        <p:spPr>
+          <a:xfrm>
+            <a:off x="160626" y="116840"/>
+            <a:ext cx="12951931" cy="6101080"/>
+          </a:xfrm>
+          <a:prstGeom prst="rect">
+            <a:avLst/>
+          </a:prstGeom>
+        </p:spPr>
+      </p:pic>
+    </p:spTree>
+    <p:extLst>
+      <p:ext uri="{BB962C8B-B14F-4D97-AF65-F5344CB8AC3E}">
+        <p14:creationId xmlns:p14="http://schemas.microsoft.com/office/powerpoint/2010/main" val="316432251"/>
+      </p:ext>
+    </p:extLst>
+  </p:cSld>
+  <p:clrMapOvr>
+    <a:masterClrMapping/>
+  </p:clrMapOvr>
+</p:sld>
+</file>
+
+<file path=ppt/slides/slide2.xml><?xml version="1.0" encoding="utf-8"?>
+<p:sld xmlns:a="http://schemas.openxmlformats.org/drawingml/2006/main" xmlns:r="http://schemas.openxmlformats.org/officeDocument/2006/relationships" xmlns:p="http://schemas.openxmlformats.org/presentationml/2006/main">
+  <p:cSld>
+    <p:spTree>
+      <p:nvGrpSpPr>
+        <p:cNvPr id="1" name=""/>
+        <p:cNvGrpSpPr/>
+        <p:nvPr/>
+      </p:nvGrpSpPr>
+      <p:grpSpPr>
+        <a:xfrm>
+          <a:off x="0" y="0"/>
+          <a:ext cx="0" cy="0"/>
+          <a:chOff x="0" y="0"/>
+          <a:chExt cx="0" cy="0"/>
+        </a:xfrm>
+      </p:grpSpPr>
+      <p:sp>
+        <p:nvSpPr>
+          <p:cNvPr id="2" name="Title 1">
+            <a:extLst>
+              <a:ext uri="{FF2B5EF4-FFF2-40B4-BE49-F238E27FC236}">
+                <a16:creationId xmlns:a16="http://schemas.microsoft.com/office/drawing/2014/main" id="{73757051-F089-98C3-DCDD-1F5E10B863CF}"/>
+              </a:ext>
+            </a:extLst>
+          </p:cNvPr>
+          <p:cNvSpPr>
+            <a:spLocks noGrp="1"/>
+          </p:cNvSpPr>
+          <p:nvPr>
+            <p:ph type="title"/>
+          </p:nvPr>
+        </p:nvSpPr>
+        <p:spPr/>
+        <p:txBody>
+          <a:bodyPr/>
+          <a:lstStyle/>
+          <a:p>
+            <a:r>
+              <a:rPr lang="en-US" dirty="0"/>
+              <a:t>BG: what is input data</a:t>
+            </a:r>
+          </a:p>
+        </p:txBody>
+      </p:sp>
+      <p:sp>
+        <p:nvSpPr>
+          <p:cNvPr id="3" name="Content Placeholder 2">
+            <a:extLst>
+              <a:ext uri="{FF2B5EF4-FFF2-40B4-BE49-F238E27FC236}">
+                <a16:creationId xmlns:a16="http://schemas.microsoft.com/office/drawing/2014/main" id="{DC2B8B49-EECB-7004-AF84-A24DFFFD7DF1}"/>
+              </a:ext>
+            </a:extLst>
+          </p:cNvPr>
+          <p:cNvSpPr>
+            <a:spLocks noGrp="1"/>
+          </p:cNvSpPr>
+          <p:nvPr>
+            <p:ph idx="1"/>
+          </p:nvPr>
+        </p:nvSpPr>
+        <p:spPr/>
+        <p:txBody>
+          <a:bodyPr/>
+          <a:lstStyle/>
+          <a:p>
+            <a:pPr marL="0" indent="0">
+              <a:buNone/>
+            </a:pPr>
+            <a:r>
+              <a:rPr lang="en-US" dirty="0"/>
+              <a:t>1 plots Az vs time + temps  over 10 min  for few + </a:t>
+            </a:r>
+            <a:r>
+              <a:rPr lang="en-US" dirty="0" err="1"/>
+              <a:t>elvation</a:t>
+            </a:r>
+            <a:r>
+              <a:rPr lang="en-US" dirty="0"/>
+              <a:t>  </a:t>
+            </a:r>
+          </a:p>
+          <a:p>
+            <a:pPr marL="514350" indent="-514350">
+              <a:buAutoNum type="arabicPlain" startAt="2"/>
+            </a:pPr>
+            <a:r>
+              <a:rPr lang="en-US" dirty="0" err="1"/>
+              <a:t>cal</a:t>
+            </a:r>
+            <a:r>
+              <a:rPr lang="en-US" dirty="0"/>
+              <a:t> num of lines and time leap for one month</a:t>
+            </a:r>
+          </a:p>
+          <a:p>
+            <a:pPr marL="0" indent="0">
+              <a:buNone/>
+            </a:pPr>
+            <a:r>
+              <a:rPr lang="en-US" dirty="0"/>
+              <a:t>3    overview slides </a:t>
+            </a:r>
+          </a:p>
+          <a:p>
+            <a:pPr marL="0" indent="0">
+              <a:buNone/>
+            </a:pPr>
+            <a:endParaRPr lang="en-US" dirty="0"/>
+          </a:p>
+        </p:txBody>
+      </p:sp>
+      <p:sp>
+        <p:nvSpPr>
+          <p:cNvPr id="4" name="Title 1">
+            <a:extLst>
+              <a:ext uri="{FF2B5EF4-FFF2-40B4-BE49-F238E27FC236}">
+                <a16:creationId xmlns:a16="http://schemas.microsoft.com/office/drawing/2014/main" id="{43E32FBA-019B-1571-CCED-31A6317C1EE0}"/>
+              </a:ext>
+            </a:extLst>
+          </p:cNvPr>
+          <p:cNvSpPr txBox="1">
+            <a:spLocks/>
+          </p:cNvSpPr>
+          <p:nvPr/>
+        </p:nvSpPr>
+        <p:spPr>
+          <a:xfrm>
+            <a:off x="1958340" y="2269809"/>
+            <a:ext cx="6576060" cy="45719"/>
+          </a:xfrm>
+          <a:prstGeom prst="rect">
+            <a:avLst/>
+          </a:prstGeom>
+        </p:spPr>
+        <p:txBody>
+          <a:bodyPr vert="horz" lIns="91440" tIns="45720" rIns="91440" bIns="45720" rtlCol="0" anchor="ctr">
+            <a:normAutofit fontScale="25000" lnSpcReduction="20000"/>
+          </a:bodyPr>
+          <a:lstStyle>
+            <a:lvl1pPr algn="l" defTabSz="914400" rtl="0" eaLnBrk="1" latinLnBrk="0" hangingPunct="1">
+              <a:lnSpc>
+                <a:spcPct val="90000"/>
+              </a:lnSpc>
+              <a:spcBef>
+                <a:spcPct val="0"/>
+              </a:spcBef>
+              <a:buNone/>
+              <a:defRPr sz="4400" kern="1200">
+                <a:solidFill>
+                  <a:schemeClr val="tx1"/>
+                </a:solidFill>
+                <a:latin typeface="+mj-lt"/>
+                <a:ea typeface="+mj-ea"/>
+                <a:cs typeface="+mj-cs"/>
+              </a:defRPr>
+            </a:lvl1pPr>
+          </a:lstStyle>
+          <a:p>
+            <a:r>
+              <a:rPr lang="en-US"/>
+              <a:t>how line of sight to zenith </a:t>
+            </a:r>
+            <a:endParaRPr lang="en-US" dirty="0"/>
+          </a:p>
+        </p:txBody>
+      </p:sp>
+    </p:spTree>
+    <p:extLst>
+      <p:ext uri="{BB962C8B-B14F-4D97-AF65-F5344CB8AC3E}">
+        <p14:creationId xmlns:p14="http://schemas.microsoft.com/office/powerpoint/2010/main" val="2739572051"/>
+      </p:ext>
+    </p:extLst>
+  </p:cSld>
+  <p:clrMapOvr>
+    <a:masterClrMapping/>
+  </p:clrMapOvr>
+</p:sld>
+</file>
+
+<file path=ppt/slides/slide3.xml><?xml version="1.0" encoding="utf-8"?>
+<p:sld xmlns:a="http://schemas.openxmlformats.org/drawingml/2006/main" xmlns:r="http://schemas.openxmlformats.org/officeDocument/2006/relationships" xmlns:p="http://schemas.openxmlformats.org/presentationml/2006/main">
+  <p:cSld>
+    <p:spTree>
+      <p:nvGrpSpPr>
+        <p:cNvPr id="1" name=""/>
+        <p:cNvGrpSpPr/>
+        <p:nvPr/>
+      </p:nvGrpSpPr>
+      <p:grpSpPr>
+        <a:xfrm>
+          <a:off x="0" y="0"/>
+          <a:ext cx="0" cy="0"/>
+          <a:chOff x="0" y="0"/>
+          <a:chExt cx="0" cy="0"/>
+        </a:xfrm>
+      </p:grpSpPr>
+      <p:pic>
+        <p:nvPicPr>
+          <p:cNvPr id="57" name="Picture 56" descr="Diagram of a diagram of a slope&#10;&#10;AI-generated content may be incorrect.">
+            <a:extLst>
+              <a:ext uri="{FF2B5EF4-FFF2-40B4-BE49-F238E27FC236}">
+                <a16:creationId xmlns:a16="http://schemas.microsoft.com/office/drawing/2014/main" id="{42DAAB27-0A38-D061-6D76-4426721EC058}"/>
+              </a:ext>
+            </a:extLst>
+          </p:cNvPr>
+          <p:cNvPicPr>
+            <a:picLocks noChangeAspect="1"/>
+          </p:cNvPicPr>
+          <p:nvPr/>
+        </p:nvPicPr>
+        <p:blipFill>
+          <a:blip r:embed="rId2">
+            <a:extLst>
+              <a:ext uri="{28A0092B-C50C-407E-A947-70E740481C1C}">
+                <a14:useLocalDpi xmlns:a14="http://schemas.microsoft.com/office/drawing/2010/main" val="0"/>
+              </a:ext>
+            </a:extLst>
+          </a:blip>
+          <a:stretch>
+            <a:fillRect/>
+          </a:stretch>
+        </p:blipFill>
+        <p:spPr>
+          <a:xfrm>
+            <a:off x="6299200" y="2709947"/>
+            <a:ext cx="5895213" cy="4133585"/>
+          </a:xfrm>
+          <a:prstGeom prst="rect">
+            <a:avLst/>
+          </a:prstGeom>
+        </p:spPr>
+      </p:pic>
+      <p:sp>
+        <p:nvSpPr>
+          <p:cNvPr id="2" name="Title 1">
+            <a:extLst>
+              <a:ext uri="{FF2B5EF4-FFF2-40B4-BE49-F238E27FC236}">
+                <a16:creationId xmlns:a16="http://schemas.microsoft.com/office/drawing/2014/main" id="{4B0907F7-AEFF-FB05-E679-83F424333970}"/>
+              </a:ext>
+            </a:extLst>
+          </p:cNvPr>
+          <p:cNvSpPr>
+            <a:spLocks noGrp="1"/>
+          </p:cNvSpPr>
+          <p:nvPr>
+            <p:ph type="title"/>
+          </p:nvPr>
+        </p:nvSpPr>
+        <p:spPr/>
+        <p:txBody>
+          <a:bodyPr/>
+          <a:lstStyle/>
+          <a:p>
+            <a:r>
+              <a:rPr lang="en-US" dirty="0"/>
+              <a:t>What I used in data</a:t>
+            </a:r>
+          </a:p>
+        </p:txBody>
+      </p:sp>
+      <p:sp>
+        <p:nvSpPr>
+          <p:cNvPr id="4" name="TextBox 3">
+            <a:extLst>
+              <a:ext uri="{FF2B5EF4-FFF2-40B4-BE49-F238E27FC236}">
+                <a16:creationId xmlns:a16="http://schemas.microsoft.com/office/drawing/2014/main" id="{2BD3A76B-5F0D-0D88-2A56-9C0AD1890B7D}"/>
+              </a:ext>
+            </a:extLst>
+          </p:cNvPr>
+          <p:cNvSpPr txBox="1"/>
+          <p:nvPr/>
+        </p:nvSpPr>
+        <p:spPr>
+          <a:xfrm>
+            <a:off x="838200" y="2478083"/>
+            <a:ext cx="5772912" cy="1200329"/>
+          </a:xfrm>
+          <a:prstGeom prst="rect">
+            <a:avLst/>
+          </a:prstGeom>
+          <a:noFill/>
+        </p:spPr>
+        <p:txBody>
+          <a:bodyPr wrap="square" rtlCol="0">
+            <a:spAutoFit/>
+          </a:bodyPr>
+          <a:lstStyle/>
+          <a:p>
+            <a:r>
+              <a:rPr lang="en-US" dirty="0"/>
+              <a:t>TIME</a:t>
+            </a:r>
+          </a:p>
+          <a:p>
+            <a:r>
+              <a:rPr lang="en-US" dirty="0"/>
+              <a:t>TSRC0 TSRC1 TSRC2 TSRC3 : the observing temperature </a:t>
+            </a:r>
+          </a:p>
+          <a:p>
+            <a:r>
+              <a:rPr lang="en-US" dirty="0"/>
+              <a:t>EL </a:t>
+            </a:r>
+          </a:p>
+          <a:p>
+            <a:r>
+              <a:rPr lang="en-US" dirty="0"/>
+              <a:t>AZ</a:t>
+            </a:r>
+          </a:p>
+        </p:txBody>
+      </p:sp>
+      <p:sp>
+        <p:nvSpPr>
+          <p:cNvPr id="58" name="TextBox 57">
+            <a:extLst>
+              <a:ext uri="{FF2B5EF4-FFF2-40B4-BE49-F238E27FC236}">
+                <a16:creationId xmlns:a16="http://schemas.microsoft.com/office/drawing/2014/main" id="{DBE34FB4-BAD2-8F79-8931-F8CCCE6A3966}"/>
+              </a:ext>
+            </a:extLst>
+          </p:cNvPr>
+          <p:cNvSpPr txBox="1"/>
+          <p:nvPr/>
+        </p:nvSpPr>
+        <p:spPr>
+          <a:xfrm>
+            <a:off x="838200" y="1622720"/>
+            <a:ext cx="8652818" cy="523220"/>
+          </a:xfrm>
+          <a:prstGeom prst="rect">
+            <a:avLst/>
+          </a:prstGeom>
+          <a:noFill/>
+          <a:ln>
+            <a:solidFill>
+              <a:schemeClr val="tx1"/>
+            </a:solidFill>
+          </a:ln>
+        </p:spPr>
+        <p:txBody>
+          <a:bodyPr wrap="none" rtlCol="0">
+            <a:spAutoFit/>
+          </a:bodyPr>
+          <a:lstStyle/>
+          <a:p>
+            <a:r>
+              <a:rPr lang="en-US" sz="1400" b="1" dirty="0">
+                <a:solidFill>
+                  <a:schemeClr val="bg1"/>
+                </a:solidFill>
+                <a:highlight>
+                  <a:srgbClr val="000000"/>
+                </a:highlight>
+              </a:rPr>
+              <a:t>TIME …… TSRC0 TSRC1 TSRC2 TSRC3 EL AZ</a:t>
+            </a:r>
+          </a:p>
+          <a:p>
+            <a:r>
+              <a:rPr lang="en-US" sz="1400" b="1" dirty="0">
+                <a:solidFill>
+                  <a:schemeClr val="bg1"/>
+                </a:solidFill>
+                <a:highlight>
+                  <a:srgbClr val="000000"/>
+                </a:highlight>
+              </a:rPr>
+              <a:t>2024-06-12T19:01:36.642127 …… 64.9747390747 34.9560852051 21.7463874817 16.6668453217 55.0 2.625</a:t>
+            </a:r>
+          </a:p>
+        </p:txBody>
+      </p:sp>
+    </p:spTree>
+    <p:extLst>
+      <p:ext uri="{BB962C8B-B14F-4D97-AF65-F5344CB8AC3E}">
+        <p14:creationId xmlns:p14="http://schemas.microsoft.com/office/powerpoint/2010/main" val="1445132654"/>
+      </p:ext>
+    </p:extLst>
+  </p:cSld>
+  <p:clrMapOvr>
+    <a:masterClrMapping/>
+  </p:clrMapOvr>
+</p:sld>
+</file>
+
+<file path=ppt/slides/slide4.xml><?xml version="1.0" encoding="utf-8"?>
+<p:sld xmlns:a="http://schemas.openxmlformats.org/drawingml/2006/main" xmlns:r="http://schemas.openxmlformats.org/officeDocument/2006/relationships" xmlns:p="http://schemas.openxmlformats.org/presentationml/2006/main">
+  <p:cSld>
+    <p:spTree>
+      <p:nvGrpSpPr>
+        <p:cNvPr id="1" name=""/>
+        <p:cNvGrpSpPr/>
+        <p:nvPr/>
+      </p:nvGrpSpPr>
+      <p:grpSpPr>
+        <a:xfrm>
+          <a:off x="0" y="0"/>
+          <a:ext cx="0" cy="0"/>
+          <a:chOff x="0" y="0"/>
+          <a:chExt cx="0" cy="0"/>
+        </a:xfrm>
+      </p:grpSpPr>
+      <p:sp>
+        <p:nvSpPr>
+          <p:cNvPr id="2" name="Title 1">
+            <a:extLst>
+              <a:ext uri="{FF2B5EF4-FFF2-40B4-BE49-F238E27FC236}">
+                <a16:creationId xmlns:a16="http://schemas.microsoft.com/office/drawing/2014/main" id="{28BD7BB8-5044-7AFE-5C86-54D8CAE575A6}"/>
+              </a:ext>
+            </a:extLst>
+          </p:cNvPr>
+          <p:cNvSpPr>
+            <a:spLocks noGrp="1"/>
+          </p:cNvSpPr>
+          <p:nvPr>
+            <p:ph type="title"/>
+          </p:nvPr>
+        </p:nvSpPr>
+        <p:spPr/>
+        <p:txBody>
+          <a:bodyPr/>
+          <a:lstStyle/>
+          <a:p>
+            <a:r>
+              <a:rPr lang="en-US" dirty="0"/>
+              <a:t>How avg</a:t>
+            </a:r>
+          </a:p>
+        </p:txBody>
+      </p:sp>
+      <p:sp>
+        <p:nvSpPr>
+          <p:cNvPr id="3" name="Content Placeholder 2">
+            <a:extLst>
+              <a:ext uri="{FF2B5EF4-FFF2-40B4-BE49-F238E27FC236}">
+                <a16:creationId xmlns:a16="http://schemas.microsoft.com/office/drawing/2014/main" id="{3B4CD369-9A6B-7D5E-3F16-8031223AFACA}"/>
+              </a:ext>
+            </a:extLst>
+          </p:cNvPr>
+          <p:cNvSpPr>
+            <a:spLocks noGrp="1"/>
+          </p:cNvSpPr>
+          <p:nvPr>
+            <p:ph idx="1"/>
+          </p:nvPr>
+        </p:nvSpPr>
+        <p:spPr/>
+        <p:txBody>
+          <a:bodyPr/>
+          <a:lstStyle/>
+          <a:p>
+            <a:endParaRPr lang="en-US"/>
+          </a:p>
+        </p:txBody>
+      </p:sp>
+      <p:pic>
+        <p:nvPicPr>
+          <p:cNvPr id="5" name="Picture 4">
+            <a:extLst>
+              <a:ext uri="{FF2B5EF4-FFF2-40B4-BE49-F238E27FC236}">
+                <a16:creationId xmlns:a16="http://schemas.microsoft.com/office/drawing/2014/main" id="{46B1D730-0653-5A44-F82A-06DD7C228D62}"/>
+              </a:ext>
+            </a:extLst>
+          </p:cNvPr>
+          <p:cNvPicPr>
+            <a:picLocks noChangeAspect="1"/>
+          </p:cNvPicPr>
+          <p:nvPr/>
+        </p:nvPicPr>
+        <p:blipFill>
+          <a:blip r:embed="rId2"/>
+          <a:stretch>
+            <a:fillRect/>
+          </a:stretch>
+        </p:blipFill>
+        <p:spPr>
+          <a:xfrm>
+            <a:off x="562225" y="1413710"/>
+            <a:ext cx="11067550" cy="5366084"/>
+          </a:xfrm>
+          <a:prstGeom prst="rect">
+            <a:avLst/>
+          </a:prstGeom>
+        </p:spPr>
+      </p:pic>
+      <p:pic>
+        <p:nvPicPr>
+          <p:cNvPr id="7" name="Picture 6">
+            <a:extLst>
+              <a:ext uri="{FF2B5EF4-FFF2-40B4-BE49-F238E27FC236}">
+                <a16:creationId xmlns:a16="http://schemas.microsoft.com/office/drawing/2014/main" id="{791969D9-3010-652F-261F-D12810814460}"/>
+              </a:ext>
+            </a:extLst>
+          </p:cNvPr>
+          <p:cNvPicPr>
+            <a:picLocks noChangeAspect="1"/>
+          </p:cNvPicPr>
+          <p:nvPr/>
+        </p:nvPicPr>
+        <p:blipFill>
+          <a:blip r:embed="rId3"/>
+          <a:stretch>
+            <a:fillRect/>
+          </a:stretch>
+        </p:blipFill>
+        <p:spPr>
+          <a:xfrm>
+            <a:off x="4503938" y="148647"/>
+            <a:ext cx="5506218" cy="2305372"/>
+          </a:xfrm>
+          <a:prstGeom prst="rect">
+            <a:avLst/>
+          </a:prstGeom>
+        </p:spPr>
+      </p:pic>
+    </p:spTree>
+    <p:extLst>
+      <p:ext uri="{BB962C8B-B14F-4D97-AF65-F5344CB8AC3E}">
+        <p14:creationId xmlns:p14="http://schemas.microsoft.com/office/powerpoint/2010/main" val="1219818364"/>
+      </p:ext>
+    </p:extLst>
+  </p:cSld>
+  <p:clrMapOvr>
+    <a:masterClrMapping/>
+  </p:clrMapOvr>
+</p:sld>
+</file>
+
+<file path=ppt/slides/slide5.xml><?xml version="1.0" encoding="utf-8"?>
+<p:sld xmlns:a="http://schemas.openxmlformats.org/drawingml/2006/main" xmlns:r="http://schemas.openxmlformats.org/officeDocument/2006/relationships" xmlns:p="http://schemas.openxmlformats.org/presentationml/2006/main">
+  <p:cSld>
+    <p:spTree>
+      <p:nvGrpSpPr>
+        <p:cNvPr id="1" name=""/>
+        <p:cNvGrpSpPr/>
+        <p:nvPr/>
+      </p:nvGrpSpPr>
+      <p:grpSpPr>
+        <a:xfrm>
+          <a:off x="0" y="0"/>
+          <a:ext cx="0" cy="0"/>
+          <a:chOff x="0" y="0"/>
+          <a:chExt cx="0" cy="0"/>
+        </a:xfrm>
+      </p:grpSpPr>
+      <p:sp>
+        <p:nvSpPr>
+          <p:cNvPr id="2" name="Title 1">
+            <a:extLst>
+              <a:ext uri="{FF2B5EF4-FFF2-40B4-BE49-F238E27FC236}">
+                <a16:creationId xmlns:a16="http://schemas.microsoft.com/office/drawing/2014/main" id="{8873FED9-609E-F0C2-4B37-1CD1A2EA8A8D}"/>
+              </a:ext>
+            </a:extLst>
+          </p:cNvPr>
+          <p:cNvSpPr>
+            <a:spLocks noGrp="1"/>
+          </p:cNvSpPr>
+          <p:nvPr>
+            <p:ph type="title"/>
+          </p:nvPr>
+        </p:nvSpPr>
+        <p:spPr/>
+        <p:txBody>
+          <a:bodyPr/>
+          <a:lstStyle/>
+          <a:p>
+            <a:endParaRPr lang="en-US"/>
+          </a:p>
+        </p:txBody>
+      </p:sp>
+      <p:sp>
+        <p:nvSpPr>
+          <p:cNvPr id="3" name="Content Placeholder 2">
+            <a:extLst>
+              <a:ext uri="{FF2B5EF4-FFF2-40B4-BE49-F238E27FC236}">
+                <a16:creationId xmlns:a16="http://schemas.microsoft.com/office/drawing/2014/main" id="{0FCD3707-0B08-3AE3-1EB8-0DEDDE104B53}"/>
+              </a:ext>
+            </a:extLst>
+          </p:cNvPr>
+          <p:cNvSpPr>
+            <a:spLocks noGrp="1"/>
+          </p:cNvSpPr>
+          <p:nvPr>
+            <p:ph idx="1"/>
+          </p:nvPr>
+        </p:nvSpPr>
+        <p:spPr/>
+        <p:txBody>
+          <a:bodyPr/>
+          <a:lstStyle/>
+          <a:p>
+            <a:endParaRPr lang="en-US"/>
+          </a:p>
+        </p:txBody>
+      </p:sp>
+      <p:pic>
+        <p:nvPicPr>
+          <p:cNvPr id="5" name="Picture 4">
+            <a:extLst>
+              <a:ext uri="{FF2B5EF4-FFF2-40B4-BE49-F238E27FC236}">
+                <a16:creationId xmlns:a16="http://schemas.microsoft.com/office/drawing/2014/main" id="{C7102D8D-33EF-EAEA-0583-BA7DA1745602}"/>
+              </a:ext>
+            </a:extLst>
+          </p:cNvPr>
+          <p:cNvPicPr>
+            <a:picLocks noChangeAspect="1"/>
+          </p:cNvPicPr>
+          <p:nvPr/>
+        </p:nvPicPr>
+        <p:blipFill>
+          <a:blip r:embed="rId2"/>
+          <a:stretch>
+            <a:fillRect/>
+          </a:stretch>
+        </p:blipFill>
+        <p:spPr>
+          <a:xfrm>
+            <a:off x="0" y="655132"/>
+            <a:ext cx="12192000" cy="5547736"/>
+          </a:xfrm>
+          <a:prstGeom prst="rect">
+            <a:avLst/>
+          </a:prstGeom>
+        </p:spPr>
+      </p:pic>
+    </p:spTree>
+    <p:extLst>
+      <p:ext uri="{BB962C8B-B14F-4D97-AF65-F5344CB8AC3E}">
+        <p14:creationId xmlns:p14="http://schemas.microsoft.com/office/powerpoint/2010/main" val="296380853"/>
+      </p:ext>
+    </p:extLst>
+  </p:cSld>
+  <p:clrMapOvr>
+    <a:masterClrMapping/>
+  </p:clrMapOvr>
+</p:sld>
+</file>
+
+<file path=ppt/slides/slide6.xml><?xml version="1.0" encoding="utf-8"?>
+<p:sld xmlns:a="http://schemas.openxmlformats.org/drawingml/2006/main" xmlns:r="http://schemas.openxmlformats.org/officeDocument/2006/relationships" xmlns:p="http://schemas.openxmlformats.org/presentationml/2006/main">
+  <p:cSld>
+    <p:spTree>
+      <p:nvGrpSpPr>
+        <p:cNvPr id="1" name=""/>
+        <p:cNvGrpSpPr/>
+        <p:nvPr/>
+      </p:nvGrpSpPr>
+      <p:grpSpPr>
+        <a:xfrm>
+          <a:off x="0" y="0"/>
+          <a:ext cx="0" cy="0"/>
+          <a:chOff x="0" y="0"/>
+          <a:chExt cx="0" cy="0"/>
+        </a:xfrm>
+      </p:grpSpPr>
+      <p:pic>
+        <p:nvPicPr>
+          <p:cNvPr id="6" name="Picture 5" descr="A black background with blue and white text&#10;&#10;AI-generated content may be incorrect.">
+            <a:extLst>
+              <a:ext uri="{FF2B5EF4-FFF2-40B4-BE49-F238E27FC236}">
+                <a16:creationId xmlns:a16="http://schemas.microsoft.com/office/drawing/2014/main" id="{6EB1CB07-4FD4-A0C2-3336-71A1D23C2CEC}"/>
+              </a:ext>
+            </a:extLst>
+          </p:cNvPr>
+          <p:cNvPicPr>
+            <a:picLocks noChangeAspect="1"/>
+          </p:cNvPicPr>
+          <p:nvPr/>
+        </p:nvPicPr>
+        <p:blipFill>
+          <a:blip r:embed="rId2"/>
+          <a:srcRect l="4316" t="48702" r="22797"/>
+          <a:stretch>
+            <a:fillRect/>
+          </a:stretch>
+        </p:blipFill>
+        <p:spPr>
+          <a:xfrm>
+            <a:off x="269506" y="1039527"/>
+            <a:ext cx="5707782" cy="705642"/>
+          </a:xfrm>
+          <a:prstGeom prst="rect">
+            <a:avLst/>
+          </a:prstGeom>
+        </p:spPr>
+      </p:pic>
+      <p:sp>
+        <p:nvSpPr>
+          <p:cNvPr id="7" name="TextBox 6">
+            <a:extLst>
+              <a:ext uri="{FF2B5EF4-FFF2-40B4-BE49-F238E27FC236}">
+                <a16:creationId xmlns:a16="http://schemas.microsoft.com/office/drawing/2014/main" id="{EAFC5FC2-9941-2E65-1DE0-31041B015040}"/>
+              </a:ext>
+            </a:extLst>
+          </p:cNvPr>
+          <p:cNvSpPr txBox="1"/>
+          <p:nvPr/>
+        </p:nvSpPr>
+        <p:spPr>
+          <a:xfrm>
+            <a:off x="173254" y="192505"/>
+            <a:ext cx="2293064" cy="705642"/>
+          </a:xfrm>
+          <a:prstGeom prst="rect">
+            <a:avLst/>
+          </a:prstGeom>
+        </p:spPr>
+        <p:txBody>
+          <a:bodyPr vert="horz" lIns="91440" tIns="45720" rIns="91440" bIns="45720" rtlCol="0" anchor="ctr">
+            <a:normAutofit/>
+          </a:bodyPr>
+          <a:lstStyle>
+            <a:lvl1pPr>
+              <a:lnSpc>
+                <a:spcPct val="90000"/>
+              </a:lnSpc>
+              <a:spcBef>
+                <a:spcPct val="0"/>
+              </a:spcBef>
+              <a:buNone/>
+              <a:defRPr sz="4400">
+                <a:latin typeface="+mj-lt"/>
+                <a:ea typeface="+mj-ea"/>
+                <a:cs typeface="+mj-cs"/>
+              </a:defRPr>
+            </a:lvl1pPr>
+          </a:lstStyle>
+          <a:p>
+            <a:r>
+              <a:rPr lang="en-US" dirty="0"/>
+              <a:t>am fitting</a:t>
+            </a:r>
+          </a:p>
+        </p:txBody>
+      </p:sp>
+      <p:pic>
+        <p:nvPicPr>
+          <p:cNvPr id="11" name="Picture 10">
+            <a:extLst>
+              <a:ext uri="{FF2B5EF4-FFF2-40B4-BE49-F238E27FC236}">
+                <a16:creationId xmlns:a16="http://schemas.microsoft.com/office/drawing/2014/main" id="{B3F0DFE5-A6DC-DE55-E727-98D622B10168}"/>
+              </a:ext>
+            </a:extLst>
+          </p:cNvPr>
+          <p:cNvPicPr>
+            <a:picLocks noChangeAspect="1"/>
+          </p:cNvPicPr>
+          <p:nvPr/>
+        </p:nvPicPr>
+        <p:blipFill>
+          <a:blip r:embed="rId3"/>
+          <a:stretch>
+            <a:fillRect/>
+          </a:stretch>
+        </p:blipFill>
+        <p:spPr>
+          <a:xfrm>
+            <a:off x="269506" y="2204183"/>
+            <a:ext cx="8564170" cy="2286319"/>
+          </a:xfrm>
+          <a:prstGeom prst="rect">
+            <a:avLst/>
+          </a:prstGeom>
+        </p:spPr>
+      </p:pic>
+      <p:sp>
+        <p:nvSpPr>
+          <p:cNvPr id="13" name="TextBox 12">
+            <a:extLst>
+              <a:ext uri="{FF2B5EF4-FFF2-40B4-BE49-F238E27FC236}">
+                <a16:creationId xmlns:a16="http://schemas.microsoft.com/office/drawing/2014/main" id="{F44E12F6-1DC6-57D8-8E13-F59581811CF3}"/>
+              </a:ext>
+            </a:extLst>
+          </p:cNvPr>
+          <p:cNvSpPr txBox="1"/>
+          <p:nvPr/>
+        </p:nvSpPr>
+        <p:spPr>
+          <a:xfrm>
+            <a:off x="6096000" y="975728"/>
+            <a:ext cx="486030" cy="769441"/>
+          </a:xfrm>
+          <a:prstGeom prst="rect">
+            <a:avLst/>
+          </a:prstGeom>
+          <a:noFill/>
+        </p:spPr>
+        <p:txBody>
+          <a:bodyPr wrap="none" rtlCol="0">
+            <a:spAutoFit/>
+          </a:bodyPr>
+          <a:lstStyle/>
+          <a:p>
+            <a:r>
+              <a:rPr lang="en-US" sz="4400" b="1" dirty="0"/>
+              <a:t>=</a:t>
+            </a:r>
+          </a:p>
+        </p:txBody>
+      </p:sp>
+      <p:sp>
+        <p:nvSpPr>
+          <p:cNvPr id="15" name="TextBox 14">
+            <a:extLst>
+              <a:ext uri="{FF2B5EF4-FFF2-40B4-BE49-F238E27FC236}">
+                <a16:creationId xmlns:a16="http://schemas.microsoft.com/office/drawing/2014/main" id="{3CCF37B7-A53B-2D02-0F99-150B3529D79C}"/>
+              </a:ext>
+            </a:extLst>
+          </p:cNvPr>
+          <p:cNvSpPr txBox="1"/>
+          <p:nvPr/>
+        </p:nvSpPr>
+        <p:spPr>
+          <a:xfrm>
+            <a:off x="269506" y="4775580"/>
+            <a:ext cx="10913606" cy="1569660"/>
+          </a:xfrm>
+          <a:prstGeom prst="rect">
+            <a:avLst/>
+          </a:prstGeom>
+          <a:noFill/>
+        </p:spPr>
+        <p:txBody>
+          <a:bodyPr wrap="square" rtlCol="0">
+            <a:spAutoFit/>
+          </a:bodyPr>
+          <a:lstStyle/>
+          <a:p>
+            <a:pPr lvl="0" eaLnBrk="0" fontAlgn="base" hangingPunct="0">
+              <a:spcBef>
+                <a:spcPct val="0"/>
+              </a:spcBef>
+              <a:spcAft>
+                <a:spcPct val="0"/>
+              </a:spcAft>
+            </a:pPr>
+            <a:r>
+              <a:rPr lang="en-US" altLang="en-US" sz="2400" dirty="0">
+                <a:latin typeface="Arial" panose="020B0604020202020204" pitchFamily="34" charset="0"/>
+              </a:rPr>
+              <a:t>The first warning seems to happen mostly in the mesosphere and stratosphere, rather than in the troposphere. Therefore, the </a:t>
+            </a:r>
+            <a:r>
+              <a:rPr lang="en-US" altLang="en-US" sz="2400" dirty="0" err="1">
+                <a:latin typeface="Arial" panose="020B0604020202020204" pitchFamily="34" charset="0"/>
+              </a:rPr>
+              <a:t>pwv</a:t>
+            </a:r>
+            <a:r>
+              <a:rPr lang="en-US" altLang="en-US" sz="2400" dirty="0">
+                <a:latin typeface="Arial" panose="020B0604020202020204" pitchFamily="34" charset="0"/>
+              </a:rPr>
+              <a:t> should have a very low influence.</a:t>
+            </a:r>
+          </a:p>
+          <a:p>
+            <a:pPr lvl="0" eaLnBrk="0" fontAlgn="base" hangingPunct="0">
+              <a:spcBef>
+                <a:spcPct val="0"/>
+              </a:spcBef>
+              <a:spcAft>
+                <a:spcPct val="0"/>
+              </a:spcAft>
+            </a:pPr>
+            <a:r>
+              <a:rPr lang="en-US" altLang="en-US" sz="2400" dirty="0">
+                <a:latin typeface="Arial" panose="020B0604020202020204" pitchFamily="34" charset="0"/>
+              </a:rPr>
+              <a:t>The second warning is about the output tau, which we did use.</a:t>
+            </a:r>
+          </a:p>
+        </p:txBody>
+      </p:sp>
+    </p:spTree>
+    <p:extLst>
+      <p:ext uri="{BB962C8B-B14F-4D97-AF65-F5344CB8AC3E}">
+        <p14:creationId xmlns:p14="http://schemas.microsoft.com/office/powerpoint/2010/main" val="1937469716"/>
+      </p:ext>
+    </p:extLst>
+  </p:cSld>
+  <p:clrMapOvr>
+    <a:masterClrMapping/>
+  </p:clrMapOvr>
+</p:sld>
+</file>
+
+<file path=ppt/slides/slide7.xml><?xml version="1.0" encoding="utf-8"?>
+<p:sld xmlns:a="http://schemas.openxmlformats.org/drawingml/2006/main" xmlns:r="http://schemas.openxmlformats.org/officeDocument/2006/relationships" xmlns:p="http://schemas.openxmlformats.org/presentationml/2006/main">
+  <p:cSld>
+    <p:spTree>
+      <p:nvGrpSpPr>
+        <p:cNvPr id="1" name=""/>
+        <p:cNvGrpSpPr/>
+        <p:nvPr/>
+      </p:nvGrpSpPr>
+      <p:grpSpPr>
+        <a:xfrm>
+          <a:off x="0" y="0"/>
+          <a:ext cx="0" cy="0"/>
+          <a:chOff x="0" y="0"/>
+          <a:chExt cx="0" cy="0"/>
+        </a:xfrm>
+      </p:grpSpPr>
+      <p:sp>
+        <p:nvSpPr>
+          <p:cNvPr id="2" name="Title 1">
+            <a:extLst>
+              <a:ext uri="{FF2B5EF4-FFF2-40B4-BE49-F238E27FC236}">
+                <a16:creationId xmlns:a16="http://schemas.microsoft.com/office/drawing/2014/main" id="{578380FA-537A-8AB3-577D-A17CDEB78D41}"/>
+              </a:ext>
+            </a:extLst>
+          </p:cNvPr>
+          <p:cNvSpPr>
+            <a:spLocks noGrp="1"/>
+          </p:cNvSpPr>
+          <p:nvPr>
+            <p:ph type="title"/>
+          </p:nvPr>
+        </p:nvSpPr>
+        <p:spPr>
+          <a:xfrm>
+            <a:off x="0" y="-260517"/>
+            <a:ext cx="10515600" cy="1325563"/>
+          </a:xfrm>
+        </p:spPr>
+        <p:txBody>
+          <a:bodyPr/>
+          <a:lstStyle/>
+          <a:p>
+            <a:r>
+              <a:rPr lang="en-US" dirty="0"/>
+              <a:t>What’s the different of am fitting file</a:t>
+            </a:r>
+          </a:p>
+        </p:txBody>
+      </p:sp>
+      <p:pic>
+        <p:nvPicPr>
+          <p:cNvPr id="7" name="Picture 6" descr="A screenshot of a computer&#10;&#10;AI-generated content may be incorrect.">
+            <a:extLst>
+              <a:ext uri="{FF2B5EF4-FFF2-40B4-BE49-F238E27FC236}">
+                <a16:creationId xmlns:a16="http://schemas.microsoft.com/office/drawing/2014/main" id="{1B846278-C645-4232-AD32-6E724E95E657}"/>
+              </a:ext>
+            </a:extLst>
+          </p:cNvPr>
+          <p:cNvPicPr>
+            <a:picLocks noChangeAspect="1"/>
+          </p:cNvPicPr>
+          <p:nvPr/>
+        </p:nvPicPr>
+        <p:blipFill>
+          <a:blip r:embed="rId2">
+            <a:extLst>
+              <a:ext uri="{28A0092B-C50C-407E-A947-70E740481C1C}">
+                <a14:useLocalDpi xmlns:a14="http://schemas.microsoft.com/office/drawing/2010/main" val="0"/>
+              </a:ext>
+            </a:extLst>
+          </a:blip>
+          <a:srcRect l="498" t="35001" r="55252" b="7608"/>
+          <a:stretch>
+            <a:fillRect/>
+          </a:stretch>
+        </p:blipFill>
+        <p:spPr>
+          <a:xfrm>
+            <a:off x="202130" y="1491916"/>
+            <a:ext cx="5893869" cy="4193781"/>
+          </a:xfrm>
+          <a:prstGeom prst="rect">
+            <a:avLst/>
+          </a:prstGeom>
+        </p:spPr>
+      </p:pic>
+      <p:pic>
+        <p:nvPicPr>
+          <p:cNvPr id="8" name="Picture 7" descr="A screenshot of a computer&#10;&#10;AI-generated content may be incorrect.">
+            <a:extLst>
+              <a:ext uri="{FF2B5EF4-FFF2-40B4-BE49-F238E27FC236}">
+                <a16:creationId xmlns:a16="http://schemas.microsoft.com/office/drawing/2014/main" id="{AB0F3FFD-9827-E3A1-898C-6E19E06ED130}"/>
+              </a:ext>
+            </a:extLst>
+          </p:cNvPr>
+          <p:cNvPicPr>
+            <a:picLocks noChangeAspect="1"/>
+          </p:cNvPicPr>
+          <p:nvPr/>
+        </p:nvPicPr>
+        <p:blipFill>
+          <a:blip r:embed="rId3"/>
+          <a:srcRect t="21835" r="43072" b="7142"/>
+          <a:stretch>
+            <a:fillRect/>
+          </a:stretch>
+        </p:blipFill>
+        <p:spPr>
+          <a:xfrm>
+            <a:off x="6319499" y="1491916"/>
+            <a:ext cx="5679996" cy="4193781"/>
+          </a:xfrm>
+          <a:prstGeom prst="rect">
+            <a:avLst/>
+          </a:prstGeom>
+        </p:spPr>
+      </p:pic>
+      <p:sp>
+        <p:nvSpPr>
+          <p:cNvPr id="4" name="TextBox 3">
+            <a:extLst>
+              <a:ext uri="{FF2B5EF4-FFF2-40B4-BE49-F238E27FC236}">
+                <a16:creationId xmlns:a16="http://schemas.microsoft.com/office/drawing/2014/main" id="{8D05502C-906D-E43D-5E3B-BFA0736E8279}"/>
+              </a:ext>
+            </a:extLst>
+          </p:cNvPr>
+          <p:cNvSpPr txBox="1"/>
+          <p:nvPr/>
+        </p:nvSpPr>
+        <p:spPr>
+          <a:xfrm>
+            <a:off x="845820" y="5685697"/>
+            <a:ext cx="2136739" cy="646331"/>
+          </a:xfrm>
+          <a:prstGeom prst="rect">
+            <a:avLst/>
+          </a:prstGeom>
+          <a:noFill/>
+        </p:spPr>
+        <p:txBody>
+          <a:bodyPr wrap="none" rtlCol="0">
+            <a:spAutoFit/>
+          </a:bodyPr>
+          <a:lstStyle/>
+          <a:p>
+            <a:r>
+              <a:rPr lang="en-US" dirty="0"/>
+              <a:t>From am Cookbook</a:t>
+            </a:r>
+          </a:p>
+          <a:p>
+            <a:endParaRPr lang="en-US" dirty="0"/>
+          </a:p>
+        </p:txBody>
+      </p:sp>
+      <p:sp>
+        <p:nvSpPr>
+          <p:cNvPr id="5" name="TextBox 4">
+            <a:extLst>
+              <a:ext uri="{FF2B5EF4-FFF2-40B4-BE49-F238E27FC236}">
+                <a16:creationId xmlns:a16="http://schemas.microsoft.com/office/drawing/2014/main" id="{34484451-494B-1FD8-8202-BB9FBAD77D8F}"/>
+              </a:ext>
+            </a:extLst>
+          </p:cNvPr>
+          <p:cNvSpPr txBox="1"/>
+          <p:nvPr/>
+        </p:nvSpPr>
+        <p:spPr>
+          <a:xfrm>
+            <a:off x="6812280" y="5636517"/>
+            <a:ext cx="6156960" cy="646331"/>
+          </a:xfrm>
+          <a:prstGeom prst="rect">
+            <a:avLst/>
+          </a:prstGeom>
+          <a:noFill/>
+        </p:spPr>
+        <p:txBody>
+          <a:bodyPr wrap="square" rtlCol="0">
+            <a:spAutoFit/>
+          </a:bodyPr>
+          <a:lstStyle/>
+          <a:p>
+            <a:r>
+              <a:rPr lang="en-US" dirty="0"/>
+              <a:t>From Sofia’s code GitHub:</a:t>
+            </a:r>
+          </a:p>
+          <a:p>
+            <a:r>
+              <a:rPr lang="en-US" dirty="0"/>
+              <a:t>WVR-pipeline/ Templates/SPole_annual_50.amc</a:t>
+            </a:r>
+          </a:p>
+        </p:txBody>
+      </p:sp>
+    </p:spTree>
+    <p:extLst>
+      <p:ext uri="{BB962C8B-B14F-4D97-AF65-F5344CB8AC3E}">
+        <p14:creationId xmlns:p14="http://schemas.microsoft.com/office/powerpoint/2010/main" val="2549021408"/>
+      </p:ext>
+    </p:extLst>
+  </p:cSld>
+  <p:clrMapOvr>
+    <a:masterClrMapping/>
+  </p:clrMapOvr>
+</p:sld>
+</file>
+
+<file path=ppt/slides/slide8.xml><?xml version="1.0" encoding="utf-8"?>
+<p:sld xmlns:a="http://schemas.openxmlformats.org/drawingml/2006/main" xmlns:r="http://schemas.openxmlformats.org/officeDocument/2006/relationships" xmlns:p="http://schemas.openxmlformats.org/presentationml/2006/main">
+  <p:cSld>
+    <p:spTree>
+      <p:nvGrpSpPr>
+        <p:cNvPr id="1" name="">
+          <a:extLst>
+            <a:ext uri="{FF2B5EF4-FFF2-40B4-BE49-F238E27FC236}">
+              <a16:creationId xmlns:a16="http://schemas.microsoft.com/office/drawing/2014/main" id="{4ECA2523-5D32-9B6E-0CE8-2B0CF77BE4DD}"/>
+            </a:ext>
+          </a:extLst>
+        </p:cNvPr>
+        <p:cNvGrpSpPr/>
+        <p:nvPr/>
+      </p:nvGrpSpPr>
+      <p:grpSpPr>
+        <a:xfrm>
+          <a:off x="0" y="0"/>
+          <a:ext cx="0" cy="0"/>
+          <a:chOff x="0" y="0"/>
+          <a:chExt cx="0" cy="0"/>
+        </a:xfrm>
+      </p:grpSpPr>
+      <p:sp>
+        <p:nvSpPr>
+          <p:cNvPr id="7" name="TextBox 6">
+            <a:extLst>
+              <a:ext uri="{FF2B5EF4-FFF2-40B4-BE49-F238E27FC236}">
+                <a16:creationId xmlns:a16="http://schemas.microsoft.com/office/drawing/2014/main" id="{0C63595D-BB6F-02D8-8D0E-8ABAC6FBCE4A}"/>
+              </a:ext>
+            </a:extLst>
+          </p:cNvPr>
+          <p:cNvSpPr txBox="1"/>
+          <p:nvPr/>
+        </p:nvSpPr>
+        <p:spPr>
+          <a:xfrm>
+            <a:off x="173254" y="192505"/>
+            <a:ext cx="2293064" cy="705642"/>
+          </a:xfrm>
+          <a:prstGeom prst="rect">
+            <a:avLst/>
+          </a:prstGeom>
+        </p:spPr>
+        <p:txBody>
+          <a:bodyPr vert="horz" lIns="91440" tIns="45720" rIns="91440" bIns="45720" rtlCol="0" anchor="ctr">
+            <a:normAutofit/>
+          </a:bodyPr>
+          <a:lstStyle>
+            <a:lvl1pPr>
+              <a:lnSpc>
+                <a:spcPct val="90000"/>
+              </a:lnSpc>
+              <a:spcBef>
+                <a:spcPct val="0"/>
+              </a:spcBef>
+              <a:buNone/>
+              <a:defRPr sz="4400">
+                <a:latin typeface="+mj-lt"/>
+                <a:ea typeface="+mj-ea"/>
+                <a:cs typeface="+mj-cs"/>
+              </a:defRPr>
+            </a:lvl1pPr>
+          </a:lstStyle>
+          <a:p>
+            <a:r>
+              <a:rPr lang="en-US" dirty="0"/>
+              <a:t>am fitting</a:t>
+            </a:r>
+          </a:p>
+        </p:txBody>
+      </p:sp>
+      <p:pic>
+        <p:nvPicPr>
+          <p:cNvPr id="3" name="Picture 2" descr="A screenshot of a computer&#10;&#10;AI-generated content may be incorrect.">
+            <a:extLst>
+              <a:ext uri="{FF2B5EF4-FFF2-40B4-BE49-F238E27FC236}">
+                <a16:creationId xmlns:a16="http://schemas.microsoft.com/office/drawing/2014/main" id="{5E26C7D7-AAE3-254A-4799-3EE85BEEF40C}"/>
+              </a:ext>
+            </a:extLst>
+          </p:cNvPr>
+          <p:cNvPicPr>
+            <a:picLocks noChangeAspect="1"/>
+          </p:cNvPicPr>
+          <p:nvPr/>
+        </p:nvPicPr>
+        <p:blipFill>
+          <a:blip r:embed="rId2"/>
+          <a:stretch>
+            <a:fillRect/>
+          </a:stretch>
+        </p:blipFill>
+        <p:spPr>
+          <a:xfrm>
+            <a:off x="2630685" y="2258853"/>
+            <a:ext cx="7978321" cy="988405"/>
+          </a:xfrm>
+          <a:prstGeom prst="rect">
+            <a:avLst/>
+          </a:prstGeom>
+        </p:spPr>
+      </p:pic>
+      <p:grpSp>
+        <p:nvGrpSpPr>
+          <p:cNvPr id="16" name="Group 15">
+            <a:extLst>
+              <a:ext uri="{FF2B5EF4-FFF2-40B4-BE49-F238E27FC236}">
+                <a16:creationId xmlns:a16="http://schemas.microsoft.com/office/drawing/2014/main" id="{F5CB9E2B-7275-90F3-10B2-998DC0F88508}"/>
+              </a:ext>
+            </a:extLst>
+          </p:cNvPr>
+          <p:cNvGrpSpPr/>
+          <p:nvPr/>
+        </p:nvGrpSpPr>
+        <p:grpSpPr>
+          <a:xfrm>
+            <a:off x="2466318" y="3759056"/>
+            <a:ext cx="8501773" cy="543857"/>
+            <a:chOff x="2644763" y="3900988"/>
+            <a:chExt cx="8501773" cy="543857"/>
+          </a:xfrm>
+        </p:grpSpPr>
+        <p:pic>
+          <p:nvPicPr>
+            <p:cNvPr id="14" name="Picture 13">
+              <a:extLst>
+                <a:ext uri="{FF2B5EF4-FFF2-40B4-BE49-F238E27FC236}">
+                  <a16:creationId xmlns:a16="http://schemas.microsoft.com/office/drawing/2014/main" id="{9FF09BE9-9D1E-F5F3-A9B2-0B214D549DA7}"/>
+                </a:ext>
+              </a:extLst>
+            </p:cNvPr>
+            <p:cNvPicPr>
+              <a:picLocks noChangeAspect="1"/>
+            </p:cNvPicPr>
+            <p:nvPr/>
+          </p:nvPicPr>
+          <p:blipFill>
+            <a:blip r:embed="rId3"/>
+            <a:stretch>
+              <a:fillRect/>
+            </a:stretch>
+          </p:blipFill>
+          <p:spPr>
+            <a:xfrm>
+              <a:off x="2644763" y="3900988"/>
+              <a:ext cx="8501773" cy="543857"/>
+            </a:xfrm>
+            <a:prstGeom prst="rect">
+              <a:avLst/>
+            </a:prstGeom>
+          </p:spPr>
+        </p:pic>
+        <p:sp>
+          <p:nvSpPr>
+            <p:cNvPr id="15" name="Rectangle 14">
+              <a:extLst>
+                <a:ext uri="{FF2B5EF4-FFF2-40B4-BE49-F238E27FC236}">
+                  <a16:creationId xmlns:a16="http://schemas.microsoft.com/office/drawing/2014/main" id="{A8660B43-A5F2-C9A9-6795-6F08541F5FE8}"/>
+                </a:ext>
+              </a:extLst>
+            </p:cNvPr>
+            <p:cNvSpPr/>
+            <p:nvPr/>
+          </p:nvSpPr>
+          <p:spPr>
+            <a:xfrm>
+              <a:off x="9006840" y="4160520"/>
+              <a:ext cx="2139696" cy="284325"/>
+            </a:xfrm>
+            <a:prstGeom prst="rect">
+              <a:avLst/>
+            </a:prstGeom>
+            <a:solidFill>
+              <a:schemeClr val="bg1"/>
+            </a:solidFill>
+            <a:ln>
+              <a:solidFill>
+                <a:schemeClr val="bg1"/>
+              </a:solidFill>
+            </a:ln>
+          </p:spPr>
+          <p:style>
+            <a:lnRef idx="2">
+              <a:schemeClr val="accent1">
+                <a:shade val="15000"/>
+              </a:schemeClr>
+            </a:lnRef>
+            <a:fillRef idx="1">
+              <a:schemeClr val="accent1"/>
+            </a:fillRef>
+            <a:effectRef idx="0">
+              <a:schemeClr val="accent1"/>
+            </a:effectRef>
+            <a:fontRef idx="minor">
+              <a:schemeClr val="lt1"/>
+            </a:fontRef>
+          </p:style>
+          <p:txBody>
+            <a:bodyPr rtlCol="0" anchor="ctr"/>
+            <a:lstStyle/>
+            <a:p>
+              <a:pPr algn="ctr"/>
+              <a:endParaRPr lang="en-US"/>
+            </a:p>
+          </p:txBody>
+        </p:sp>
+      </p:grpSp>
+      <p:sp>
+        <p:nvSpPr>
+          <p:cNvPr id="17" name="TextBox 16">
+            <a:extLst>
+              <a:ext uri="{FF2B5EF4-FFF2-40B4-BE49-F238E27FC236}">
+                <a16:creationId xmlns:a16="http://schemas.microsoft.com/office/drawing/2014/main" id="{91725F19-EDB2-AF8B-7821-E9B61169D865}"/>
+              </a:ext>
+            </a:extLst>
+          </p:cNvPr>
+          <p:cNvSpPr txBox="1"/>
+          <p:nvPr/>
+        </p:nvSpPr>
+        <p:spPr>
+          <a:xfrm>
+            <a:off x="2561618" y="4302913"/>
+            <a:ext cx="8501773" cy="1754326"/>
+          </a:xfrm>
+          <a:prstGeom prst="rect">
+            <a:avLst/>
+          </a:prstGeom>
+          <a:noFill/>
+        </p:spPr>
+        <p:txBody>
+          <a:bodyPr wrap="square" rtlCol="0">
+            <a:spAutoFit/>
+          </a:bodyPr>
+          <a:lstStyle/>
+          <a:p>
+            <a:r>
+              <a:rPr lang="en-US" dirty="0"/>
+              <a:t>From </a:t>
+            </a:r>
+            <a:r>
+              <a:rPr lang="en-US" dirty="0" err="1"/>
+              <a:t>amc</a:t>
+            </a:r>
+            <a:r>
+              <a:rPr lang="en-US" dirty="0"/>
+              <a:t>, we expect the </a:t>
+            </a:r>
+            <a:r>
+              <a:rPr lang="en-US" dirty="0" err="1"/>
+              <a:t>dat</a:t>
+            </a:r>
+            <a:r>
+              <a:rPr lang="en-US" dirty="0"/>
+              <a:t> file as</a:t>
+            </a:r>
+          </a:p>
+          <a:p>
+            <a:r>
+              <a:rPr lang="en-US" dirty="0"/>
+              <a:t>	 frequence(</a:t>
+            </a:r>
+            <a:r>
+              <a:rPr lang="en-US" dirty="0" err="1"/>
+              <a:t>v_i</a:t>
+            </a:r>
+            <a:r>
+              <a:rPr lang="en-US" dirty="0"/>
+              <a:t>) 	</a:t>
+            </a:r>
+            <a:r>
+              <a:rPr lang="en-US" dirty="0" err="1"/>
+              <a:t>bandwith</a:t>
+            </a:r>
+            <a:r>
+              <a:rPr lang="en-US" dirty="0"/>
+              <a:t>(</a:t>
+            </a:r>
+            <a:r>
+              <a:rPr lang="en-US" dirty="0" err="1"/>
+              <a:t>b_i</a:t>
+            </a:r>
+            <a:r>
+              <a:rPr lang="en-US" dirty="0"/>
+              <a:t>)  	spectral data (</a:t>
+            </a:r>
+            <a:r>
+              <a:rPr lang="en-US" dirty="0" err="1"/>
+              <a:t>s_i</a:t>
+            </a:r>
+            <a:r>
+              <a:rPr lang="en-US" dirty="0"/>
+              <a:t>)</a:t>
+            </a:r>
+          </a:p>
+          <a:p>
+            <a:r>
+              <a:rPr lang="en-US" dirty="0"/>
+              <a:t>So, the </a:t>
+            </a:r>
+            <a:r>
+              <a:rPr lang="en-US" dirty="0" err="1"/>
+              <a:t>dat</a:t>
+            </a:r>
+            <a:r>
+              <a:rPr lang="en-US" dirty="0"/>
+              <a:t> is means:</a:t>
+            </a:r>
+          </a:p>
+          <a:p>
+            <a:r>
+              <a:rPr lang="en-US" dirty="0"/>
+              <a:t>	observing 184.55(183.3 + 1.25)  GHz, the bandwidth is 1.50 GHz, spectral data is the observing temperature </a:t>
+            </a:r>
+          </a:p>
+          <a:p>
+            <a:endParaRPr lang="en-US" dirty="0"/>
+          </a:p>
+        </p:txBody>
+      </p:sp>
+      <p:pic>
+        <p:nvPicPr>
+          <p:cNvPr id="22" name="Picture 21">
+            <a:extLst>
+              <a:ext uri="{FF2B5EF4-FFF2-40B4-BE49-F238E27FC236}">
+                <a16:creationId xmlns:a16="http://schemas.microsoft.com/office/drawing/2014/main" id="{28A343FB-936E-2D97-F687-96C21E34F13B}"/>
+              </a:ext>
+            </a:extLst>
+          </p:cNvPr>
+          <p:cNvPicPr>
+            <a:picLocks noChangeAspect="1"/>
+          </p:cNvPicPr>
+          <p:nvPr/>
+        </p:nvPicPr>
+        <p:blipFill>
+          <a:blip r:embed="rId4"/>
+          <a:stretch>
+            <a:fillRect/>
+          </a:stretch>
+        </p:blipFill>
+        <p:spPr>
+          <a:xfrm>
+            <a:off x="2630685" y="3283472"/>
+            <a:ext cx="5109124" cy="475584"/>
+          </a:xfrm>
+          <a:prstGeom prst="rect">
+            <a:avLst/>
+          </a:prstGeom>
+        </p:spPr>
+      </p:pic>
+      <p:pic>
+        <p:nvPicPr>
+          <p:cNvPr id="5" name="Picture 4">
+            <a:extLst>
+              <a:ext uri="{FF2B5EF4-FFF2-40B4-BE49-F238E27FC236}">
+                <a16:creationId xmlns:a16="http://schemas.microsoft.com/office/drawing/2014/main" id="{A11525A4-61E9-BC98-9A8B-05E443962BA7}"/>
+              </a:ext>
+            </a:extLst>
+          </p:cNvPr>
+          <p:cNvPicPr>
+            <a:picLocks noChangeAspect="1"/>
+          </p:cNvPicPr>
+          <p:nvPr/>
+        </p:nvPicPr>
+        <p:blipFill>
+          <a:blip r:embed="rId5"/>
+          <a:stretch>
+            <a:fillRect/>
+          </a:stretch>
+        </p:blipFill>
+        <p:spPr>
+          <a:xfrm>
+            <a:off x="2630685" y="525673"/>
+            <a:ext cx="7833359" cy="1667619"/>
+          </a:xfrm>
+          <a:prstGeom prst="rect">
+            <a:avLst/>
+          </a:prstGeom>
+        </p:spPr>
+      </p:pic>
+    </p:spTree>
+    <p:extLst>
+      <p:ext uri="{BB962C8B-B14F-4D97-AF65-F5344CB8AC3E}">
+        <p14:creationId xmlns:p14="http://schemas.microsoft.com/office/powerpoint/2010/main" val="362772443"/>
+      </p:ext>
+    </p:extLst>
+  </p:cSld>
+  <p:clrMapOvr>
+    <a:masterClrMapping/>
+  </p:clrMapOvr>
+</p:sld>
+</file>
+
+<file path=ppt/slides/slide9.xml><?xml version="1.0" encoding="utf-8"?>
+<p:sld xmlns:a="http://schemas.openxmlformats.org/drawingml/2006/main" xmlns:r="http://schemas.openxmlformats.org/officeDocument/2006/relationships" xmlns:p="http://schemas.openxmlformats.org/presentationml/2006/main">
+  <p:cSld>
+    <p:spTree>
+      <p:nvGrpSpPr>
+        <p:cNvPr id="1" name=""/>
+        <p:cNvGrpSpPr/>
+        <p:nvPr/>
+      </p:nvGrpSpPr>
+      <p:grpSpPr>
+        <a:xfrm>
+          <a:off x="0" y="0"/>
+          <a:ext cx="0" cy="0"/>
+          <a:chOff x="0" y="0"/>
+          <a:chExt cx="0" cy="0"/>
+        </a:xfrm>
+      </p:grpSpPr>
+      <p:sp>
+        <p:nvSpPr>
+          <p:cNvPr id="2" name="Title 1">
+            <a:extLst>
+              <a:ext uri="{FF2B5EF4-FFF2-40B4-BE49-F238E27FC236}">
+                <a16:creationId xmlns:a16="http://schemas.microsoft.com/office/drawing/2014/main" id="{DB05171B-69DA-55D5-4F3D-7E192123E4FF}"/>
+              </a:ext>
+            </a:extLst>
+          </p:cNvPr>
+          <p:cNvSpPr>
+            <a:spLocks noGrp="1"/>
+          </p:cNvSpPr>
+          <p:nvPr>
+            <p:ph type="title"/>
+          </p:nvPr>
+        </p:nvSpPr>
+        <p:spPr/>
+        <p:txBody>
+          <a:bodyPr/>
+          <a:lstStyle/>
+          <a:p>
+            <a:r>
+              <a:rPr lang="en-US" dirty="0"/>
+              <a:t>Output </a:t>
+            </a:r>
+            <a:r>
+              <a:rPr lang="en-US" dirty="0" err="1"/>
+              <a:t>amc</a:t>
+            </a:r>
+            <a:r>
+              <a:rPr lang="en-US" dirty="0"/>
+              <a:t> file</a:t>
+            </a:r>
+          </a:p>
+        </p:txBody>
+      </p:sp>
+      <p:sp>
+        <p:nvSpPr>
+          <p:cNvPr id="3" name="Content Placeholder 2">
+            <a:extLst>
+              <a:ext uri="{FF2B5EF4-FFF2-40B4-BE49-F238E27FC236}">
+                <a16:creationId xmlns:a16="http://schemas.microsoft.com/office/drawing/2014/main" id="{8D9FF148-F399-7F4B-E940-5C1FDAE2162C}"/>
+              </a:ext>
+            </a:extLst>
+          </p:cNvPr>
+          <p:cNvSpPr>
+            <a:spLocks noGrp="1"/>
+          </p:cNvSpPr>
+          <p:nvPr>
+            <p:ph idx="1"/>
+          </p:nvPr>
+        </p:nvSpPr>
+        <p:spPr/>
+        <p:txBody>
+          <a:bodyPr/>
+          <a:lstStyle/>
+          <a:p>
+            <a:endParaRPr lang="en-US"/>
+          </a:p>
+        </p:txBody>
+      </p:sp>
+      <p:pic>
+        <p:nvPicPr>
+          <p:cNvPr id="5" name="Picture 4">
+            <a:extLst>
+              <a:ext uri="{FF2B5EF4-FFF2-40B4-BE49-F238E27FC236}">
+                <a16:creationId xmlns:a16="http://schemas.microsoft.com/office/drawing/2014/main" id="{B0ACF5D0-3823-187A-ACFF-D1D7E3EEC837}"/>
+              </a:ext>
+            </a:extLst>
+          </p:cNvPr>
+          <p:cNvPicPr>
+            <a:picLocks noChangeAspect="1"/>
+          </p:cNvPicPr>
+          <p:nvPr/>
+        </p:nvPicPr>
+        <p:blipFill>
+          <a:blip r:embed="rId2"/>
+          <a:stretch>
+            <a:fillRect/>
+          </a:stretch>
+        </p:blipFill>
+        <p:spPr>
+          <a:xfrm>
+            <a:off x="5168765" y="78882"/>
+            <a:ext cx="6513225" cy="6660995"/>
+          </a:xfrm>
+          <a:prstGeom prst="rect">
+            <a:avLst/>
+          </a:prstGeom>
+        </p:spPr>
+      </p:pic>
+      <mc:AlternateContent xmlns:mc="http://schemas.openxmlformats.org/markup-compatibility/2006" xmlns:p14="http://schemas.microsoft.com/office/powerpoint/2010/main">
+        <mc:Choice Requires="p14">
+          <p:contentPart p14:bwMode="auto" r:id="rId3">
+            <p14:nvContentPartPr>
+              <p14:cNvPr id="7" name="Ink 6">
+                <a:extLst>
+                  <a:ext uri="{FF2B5EF4-FFF2-40B4-BE49-F238E27FC236}">
+                    <a16:creationId xmlns:a16="http://schemas.microsoft.com/office/drawing/2014/main" id="{372399EB-2705-52BB-4D23-D56054595D9A}"/>
+                  </a:ext>
+                </a:extLst>
+              </p14:cNvPr>
+              <p14:cNvContentPartPr/>
+              <p14:nvPr/>
+            </p14:nvContentPartPr>
+            <p14:xfrm>
+              <a:off x="5948242" y="2492716"/>
+              <a:ext cx="2585520" cy="48960"/>
+            </p14:xfrm>
+          </p:contentPart>
+        </mc:Choice>
+        <mc:Fallback xmlns="">
+          <p:pic>
+            <p:nvPicPr>
+              <p:cNvPr id="7" name="Ink 6">
+                <a:extLst>
+                  <a:ext uri="{FF2B5EF4-FFF2-40B4-BE49-F238E27FC236}">
+                    <a16:creationId xmlns:a16="http://schemas.microsoft.com/office/drawing/2014/main" id="{372399EB-2705-52BB-4D23-D56054595D9A}"/>
+                  </a:ext>
+                </a:extLst>
+              </p:cNvPr>
+              <p:cNvPicPr/>
+              <p:nvPr/>
+            </p:nvPicPr>
+            <p:blipFill>
+              <a:blip r:embed="rId4"/>
+              <a:stretch>
+                <a:fillRect/>
+              </a:stretch>
+            </p:blipFill>
+            <p:spPr>
+              <a:xfrm>
+                <a:off x="5939602" y="2484076"/>
+                <a:ext cx="2603160" cy="66600"/>
+              </a:xfrm>
+              <a:prstGeom prst="rect">
+                <a:avLst/>
+              </a:prstGeom>
+            </p:spPr>
+          </p:pic>
+        </mc:Fallback>
+      </mc:AlternateContent>
+      <mc:AlternateContent xmlns:mc="http://schemas.openxmlformats.org/markup-compatibility/2006" xmlns:p14="http://schemas.microsoft.com/office/powerpoint/2010/main">
+        <mc:Choice Requires="p14">
+          <p:contentPart p14:bwMode="auto" r:id="rId5">
+            <p14:nvContentPartPr>
+              <p14:cNvPr id="8" name="Ink 7">
+                <a:extLst>
+                  <a:ext uri="{FF2B5EF4-FFF2-40B4-BE49-F238E27FC236}">
+                    <a16:creationId xmlns:a16="http://schemas.microsoft.com/office/drawing/2014/main" id="{3F16A474-8ADC-C31D-C06B-3A952F2793AC}"/>
+                  </a:ext>
+                </a:extLst>
+              </p14:cNvPr>
+              <p14:cNvContentPartPr/>
+              <p14:nvPr/>
+            </p14:nvContentPartPr>
+            <p14:xfrm>
+              <a:off x="-260678" y="2300116"/>
+              <a:ext cx="360" cy="360"/>
+            </p14:xfrm>
+          </p:contentPart>
+        </mc:Choice>
+        <mc:Fallback xmlns="">
+          <p:pic>
+            <p:nvPicPr>
+              <p:cNvPr id="8" name="Ink 7">
+                <a:extLst>
+                  <a:ext uri="{FF2B5EF4-FFF2-40B4-BE49-F238E27FC236}">
+                    <a16:creationId xmlns:a16="http://schemas.microsoft.com/office/drawing/2014/main" id="{3F16A474-8ADC-C31D-C06B-3A952F2793AC}"/>
+                  </a:ext>
+                </a:extLst>
+              </p:cNvPr>
+              <p:cNvPicPr/>
+              <p:nvPr/>
+            </p:nvPicPr>
+            <p:blipFill>
+              <a:blip r:embed="rId6"/>
+              <a:stretch>
+                <a:fillRect/>
+              </a:stretch>
+            </p:blipFill>
+            <p:spPr>
+              <a:xfrm>
+                <a:off x="-269318" y="2291476"/>
+                <a:ext cx="18000" cy="18000"/>
+              </a:xfrm>
+              <a:prstGeom prst="rect">
+                <a:avLst/>
+              </a:prstGeom>
+            </p:spPr>
+          </p:pic>
+        </mc:Fallback>
+      </mc:AlternateContent>
+      <mc:AlternateContent xmlns:mc="http://schemas.openxmlformats.org/markup-compatibility/2006" xmlns:p14="http://schemas.microsoft.com/office/powerpoint/2010/main">
+        <mc:Choice Requires="p14">
+          <p:contentPart p14:bwMode="auto" r:id="rId7">
+            <p14:nvContentPartPr>
+              <p14:cNvPr id="6" name="Ink 5">
+                <a:extLst>
+                  <a:ext uri="{FF2B5EF4-FFF2-40B4-BE49-F238E27FC236}">
+                    <a16:creationId xmlns:a16="http://schemas.microsoft.com/office/drawing/2014/main" id="{27660623-556C-07A0-83FA-A8DB0AC9BC1C}"/>
+                  </a:ext>
+                </a:extLst>
+              </p14:cNvPr>
+              <p14:cNvContentPartPr/>
+              <p14:nvPr/>
+            </p14:nvContentPartPr>
+            <p14:xfrm>
+              <a:off x="7887665" y="2179753"/>
+              <a:ext cx="637560" cy="46440"/>
+            </p14:xfrm>
+          </p:contentPart>
+        </mc:Choice>
+        <mc:Fallback xmlns="">
+          <p:pic>
+            <p:nvPicPr>
+              <p:cNvPr id="6" name="Ink 5">
+                <a:extLst>
+                  <a:ext uri="{FF2B5EF4-FFF2-40B4-BE49-F238E27FC236}">
+                    <a16:creationId xmlns:a16="http://schemas.microsoft.com/office/drawing/2014/main" id="{27660623-556C-07A0-83FA-A8DB0AC9BC1C}"/>
+                  </a:ext>
+                </a:extLst>
+              </p:cNvPr>
+              <p:cNvPicPr/>
+              <p:nvPr/>
+            </p:nvPicPr>
+            <p:blipFill>
+              <a:blip r:embed="rId8"/>
+              <a:stretch>
+                <a:fillRect/>
+              </a:stretch>
+            </p:blipFill>
+            <p:spPr>
+              <a:xfrm>
+                <a:off x="7878665" y="2170753"/>
+                <a:ext cx="655200" cy="64080"/>
+              </a:xfrm>
+              <a:prstGeom prst="rect">
+                <a:avLst/>
+              </a:prstGeom>
+            </p:spPr>
+          </p:pic>
+        </mc:Fallback>
+      </mc:AlternateContent>
+    </p:spTree>
+    <p:extLst>
+      <p:ext uri="{BB962C8B-B14F-4D97-AF65-F5344CB8AC3E}">
+        <p14:creationId xmlns:p14="http://schemas.microsoft.com/office/powerpoint/2010/main" val="1466978456"/>
       </p:ext>
     </p:extLst>
   </p:cSld>
